--- a/public/lessons/year-6-maths/autumn/week-10/retrieve-multiplication-and-division/teaching-powerpoint-v1.pptx
+++ b/public/lessons/year-6-maths/autumn/week-10/retrieve-multiplication-and-division/teaching-powerpoint-v1.pptx
@@ -2,24 +2,24 @@
 <file path=ppt/presentation.xml><?xml version="1.0" encoding="utf-8"?>
 <p:presentation xmlns:p="http://schemas.openxmlformats.org/presentationml/2006/main">
   <p:sldMasterIdLst>
-    <p:sldMasterId xmlns:r="http://schemas.openxmlformats.org/officeDocument/2006/relationships" id="2147483648" r:id="Rb14529813c744ce4"/>
+    <p:sldMasterId xmlns:r="http://schemas.openxmlformats.org/officeDocument/2006/relationships" id="2147483648" r:id="R394c28c47268487d"/>
   </p:sldMasterIdLst>
   <p:notesMasterIdLst>
-    <p:notesMasterId xmlns:r="http://schemas.openxmlformats.org/officeDocument/2006/relationships" r:id="Rbb3cdd4dfe2d4587"/>
+    <p:notesMasterId xmlns:r="http://schemas.openxmlformats.org/officeDocument/2006/relationships" r:id="R3e2b111b36e9443e"/>
   </p:notesMasterIdLst>
   <p:sldIdLst>
-    <p:sldId xmlns:r="http://schemas.openxmlformats.org/officeDocument/2006/relationships" id="256" r:id="Rdf70e877d7f04c0f"/>
-    <p:sldId xmlns:r="http://schemas.openxmlformats.org/officeDocument/2006/relationships" id="257" r:id="R3de6df99fb774d5a"/>
-    <p:sldId xmlns:r="http://schemas.openxmlformats.org/officeDocument/2006/relationships" id="258" r:id="R662e5078b2b44a26"/>
-    <p:sldId xmlns:r="http://schemas.openxmlformats.org/officeDocument/2006/relationships" id="259" r:id="Rd91cf55a20a44cd4"/>
-    <p:sldId xmlns:r="http://schemas.openxmlformats.org/officeDocument/2006/relationships" id="260" r:id="Rf381000b388141d9"/>
-    <p:sldId xmlns:r="http://schemas.openxmlformats.org/officeDocument/2006/relationships" id="261" r:id="R80a9c7d65bea4bd9"/>
-    <p:sldId xmlns:r="http://schemas.openxmlformats.org/officeDocument/2006/relationships" id="262" r:id="Rc8894b5b010748e4"/>
-    <p:sldId xmlns:r="http://schemas.openxmlformats.org/officeDocument/2006/relationships" id="263" r:id="Rba09173811cd412b"/>
-    <p:sldId xmlns:r="http://schemas.openxmlformats.org/officeDocument/2006/relationships" id="264" r:id="Rebf591b7b4104c9c"/>
-    <p:sldId xmlns:r="http://schemas.openxmlformats.org/officeDocument/2006/relationships" id="265" r:id="Rc76e904d7d204688"/>
-    <p:sldId xmlns:r="http://schemas.openxmlformats.org/officeDocument/2006/relationships" id="266" r:id="R784fe89d400e4a8b"/>
-    <p:sldId xmlns:r="http://schemas.openxmlformats.org/officeDocument/2006/relationships" id="267" r:id="R12e5b6726fdd4636"/>
+    <p:sldId xmlns:r="http://schemas.openxmlformats.org/officeDocument/2006/relationships" id="256" r:id="R24e9e7d1ddf94287"/>
+    <p:sldId xmlns:r="http://schemas.openxmlformats.org/officeDocument/2006/relationships" id="257" r:id="R4e2652f0c1674f0c"/>
+    <p:sldId xmlns:r="http://schemas.openxmlformats.org/officeDocument/2006/relationships" id="258" r:id="R71fe50fe0eab4261"/>
+    <p:sldId xmlns:r="http://schemas.openxmlformats.org/officeDocument/2006/relationships" id="259" r:id="R536d80e5eda141ad"/>
+    <p:sldId xmlns:r="http://schemas.openxmlformats.org/officeDocument/2006/relationships" id="260" r:id="Rd8c64cb1e60240be"/>
+    <p:sldId xmlns:r="http://schemas.openxmlformats.org/officeDocument/2006/relationships" id="261" r:id="Rc42410d8a489479f"/>
+    <p:sldId xmlns:r="http://schemas.openxmlformats.org/officeDocument/2006/relationships" id="262" r:id="Rddc291e522db4770"/>
+    <p:sldId xmlns:r="http://schemas.openxmlformats.org/officeDocument/2006/relationships" id="263" r:id="R7a868683e31d4297"/>
+    <p:sldId xmlns:r="http://schemas.openxmlformats.org/officeDocument/2006/relationships" id="264" r:id="R5ded5c7f686c44fe"/>
+    <p:sldId xmlns:r="http://schemas.openxmlformats.org/officeDocument/2006/relationships" id="265" r:id="Rf5c1d4e0c5f64187"/>
+    <p:sldId xmlns:r="http://schemas.openxmlformats.org/officeDocument/2006/relationships" id="266" r:id="Rde78b60225e64ffa"/>
+    <p:sldId xmlns:r="http://schemas.openxmlformats.org/officeDocument/2006/relationships" id="267" r:id="R6a4865f1f16a4b7b"/>
   </p:sldIdLst>
   <p:sldSz cx="12192000" cy="6858000"/>
   <p:notesSz cx="6858000" cy="9144000"/>
@@ -873,7 +873,7 @@
           <a:lstStyle xmlns:a="http://schemas.openxmlformats.org/drawingml/2006/main"/>
           <a:p xmlns:a="http://schemas.openxmlformats.org/drawingml/2006/main">
             <a:r>
-              <a:t>I do. Reveal the question, setup and each calculation stage one click at a time. Pupils watch before copying. Model answer: 155,088; estimate about 4,300 x 40 = 172,000.</a:t>
+              <a:t>I do. Reveal the question, then reveal each mathematical change one click at a time. Point to the numbers and operation that changed before moving to the next line. Final answer: 155,088; estimate about 4,300 x 40 = 172,000.</a:t>
             </a:r>
           </a:p>
         </p:txBody>
@@ -1291,7 +1291,7 @@
   </p:cSld>
   <p:clrMap bg1="lt1" tx1="dk1" bg2="lt2" tx2="dk2" accent1="accent1" accent2="accent2" accent3="accent3" accent4="accent4" accent5="accent5" accent6="accent6" hlink="hlink" folHlink="folHlink"/>
   <p:sldLayoutIdLst>
-    <p:sldLayoutId xmlns:r="http://schemas.openxmlformats.org/officeDocument/2006/relationships" id="2147483649" r:id="R01aaaa10bd5044b5"/>
+    <p:sldLayoutId xmlns:r="http://schemas.openxmlformats.org/officeDocument/2006/relationships" id="2147483649" r:id="R93a1b14805df4c6d"/>
   </p:sldLayoutIdLst>
   <p:txStyles>
     <p:titleStyle>
@@ -1842,7 +1842,7 @@
           <p:cNvPr id="12" name="">
             <a:extLst xmlns:a="http://schemas.openxmlformats.org/drawingml/2006/main">
               <a:ext uri="{FF2B5EF4-FFF2-40B4-BE49-F238E27FC236}">
-                <a16:creationId xmlns:a16="http://schemas.microsoft.com/office/drawing/2014/main" id="{F7A64A36-1CFA-4479-A99B-1C61924D1AF0}"/>
+                <a16:creationId xmlns:a16="http://schemas.microsoft.com/office/drawing/2014/main" id="{7466F870-8DF5-4A83-AA74-89818AA9EE04}"/>
               </a:ext>
             </a:extLst>
           </p:cNvPr>
@@ -1874,7 +1874,7 @@
           <p:cNvPr id="2" name="">
             <a:extLst xmlns:a="http://schemas.openxmlformats.org/drawingml/2006/main">
               <a:ext uri="{FF2B5EF4-FFF2-40B4-BE49-F238E27FC236}">
-                <a16:creationId xmlns:a16="http://schemas.microsoft.com/office/drawing/2014/main" id="{BEC27567-9E00-4EE2-A1C1-7F9C77D025D9}"/>
+                <a16:creationId xmlns:a16="http://schemas.microsoft.com/office/drawing/2014/main" id="{0018139B-9AAC-468F-84FC-0AA08DDA4CE6}"/>
               </a:ext>
             </a:extLst>
           </p:cNvPr>
@@ -1931,7 +1931,7 @@
           <p:cNvPr id="3" name="">
             <a:extLst xmlns:a="http://schemas.openxmlformats.org/drawingml/2006/main">
               <a:ext uri="{FF2B5EF4-FFF2-40B4-BE49-F238E27FC236}">
-                <a16:creationId xmlns:a16="http://schemas.microsoft.com/office/drawing/2014/main" id="{78234BFF-2411-4F82-9C8A-ECE0EBB61B28}"/>
+                <a16:creationId xmlns:a16="http://schemas.microsoft.com/office/drawing/2014/main" id="{538D04A5-74A8-45F7-BE62-9339DCC3A62B}"/>
               </a:ext>
             </a:extLst>
           </p:cNvPr>
@@ -1965,7 +1965,7 @@
           <p:cNvPr id="4" name="">
             <a:extLst xmlns:a="http://schemas.openxmlformats.org/drawingml/2006/main">
               <a:ext uri="{FF2B5EF4-FFF2-40B4-BE49-F238E27FC236}">
-                <a16:creationId xmlns:a16="http://schemas.microsoft.com/office/drawing/2014/main" id="{C89DCD0A-91FF-40F2-9C49-E7E84AFEF9BD}"/>
+                <a16:creationId xmlns:a16="http://schemas.microsoft.com/office/drawing/2014/main" id="{2AD1F11B-B30F-481C-884A-BA9471B5EDCC}"/>
               </a:ext>
             </a:extLst>
           </p:cNvPr>
@@ -2022,7 +2022,7 @@
           <p:cNvPr id="5" name="">
             <a:extLst xmlns:a="http://schemas.openxmlformats.org/drawingml/2006/main">
               <a:ext uri="{FF2B5EF4-FFF2-40B4-BE49-F238E27FC236}">
-                <a16:creationId xmlns:a16="http://schemas.microsoft.com/office/drawing/2014/main" id="{F21E4366-8611-4D5B-B908-1A02C3702E63}"/>
+                <a16:creationId xmlns:a16="http://schemas.microsoft.com/office/drawing/2014/main" id="{0947721C-1F08-4CA5-A5C3-6A3E1A65E74F}"/>
               </a:ext>
             </a:extLst>
           </p:cNvPr>
@@ -2079,7 +2079,7 @@
           <p:cNvPr id="6" name="">
             <a:extLst xmlns:a="http://schemas.openxmlformats.org/drawingml/2006/main">
               <a:ext uri="{FF2B5EF4-FFF2-40B4-BE49-F238E27FC236}">
-                <a16:creationId xmlns:a16="http://schemas.microsoft.com/office/drawing/2014/main" id="{F6A120C4-BE26-45C5-8744-8C9E604CE78E}"/>
+                <a16:creationId xmlns:a16="http://schemas.microsoft.com/office/drawing/2014/main" id="{0B165DB2-AD77-447A-9631-D9235912DE03}"/>
               </a:ext>
             </a:extLst>
           </p:cNvPr>
@@ -2113,7 +2113,7 @@
           <p:cNvPr id="7" name="">
             <a:extLst xmlns:a="http://schemas.openxmlformats.org/drawingml/2006/main">
               <a:ext uri="{FF2B5EF4-FFF2-40B4-BE49-F238E27FC236}">
-                <a16:creationId xmlns:a16="http://schemas.microsoft.com/office/drawing/2014/main" id="{D78F0E5C-DA87-41AB-BE31-2A33DC2644E6}"/>
+                <a16:creationId xmlns:a16="http://schemas.microsoft.com/office/drawing/2014/main" id="{DD0827C7-8DEC-44FC-8BEA-831ABFED94D6}"/>
               </a:ext>
             </a:extLst>
           </p:cNvPr>
@@ -2170,7 +2170,7 @@
           <p:cNvPr id="8" name="">
             <a:extLst xmlns:a="http://schemas.openxmlformats.org/drawingml/2006/main">
               <a:ext uri="{FF2B5EF4-FFF2-40B4-BE49-F238E27FC236}">
-                <a16:creationId xmlns:a16="http://schemas.microsoft.com/office/drawing/2014/main" id="{88DCA9FE-F097-40CC-AA74-C7CD375A3B62}"/>
+                <a16:creationId xmlns:a16="http://schemas.microsoft.com/office/drawing/2014/main" id="{16788F7F-13F3-447B-8D34-42F41125C25D}"/>
               </a:ext>
             </a:extLst>
           </p:cNvPr>
@@ -2227,7 +2227,7 @@
           <p:cNvPr id="9" name="">
             <a:extLst xmlns:a="http://schemas.openxmlformats.org/drawingml/2006/main">
               <a:ext uri="{FF2B5EF4-FFF2-40B4-BE49-F238E27FC236}">
-                <a16:creationId xmlns:a16="http://schemas.microsoft.com/office/drawing/2014/main" id="{4EC3D020-77B5-4080-945A-7A38135FD6E4}"/>
+                <a16:creationId xmlns:a16="http://schemas.microsoft.com/office/drawing/2014/main" id="{1E3E44E8-C436-4680-9FA7-FA275395D620}"/>
               </a:ext>
             </a:extLst>
           </p:cNvPr>
@@ -2284,7 +2284,7 @@
           <p:cNvPr id="10" name="">
             <a:extLst xmlns:a="http://schemas.openxmlformats.org/drawingml/2006/main">
               <a:ext uri="{FF2B5EF4-FFF2-40B4-BE49-F238E27FC236}">
-                <a16:creationId xmlns:a16="http://schemas.microsoft.com/office/drawing/2014/main" id="{BDEEB831-A29A-4C0E-BD9A-9F05CD105C98}"/>
+                <a16:creationId xmlns:a16="http://schemas.microsoft.com/office/drawing/2014/main" id="{DE79C413-2469-4598-9946-CCFFFCD4D271}"/>
               </a:ext>
             </a:extLst>
           </p:cNvPr>
@@ -2341,7 +2341,7 @@
           <p:cNvPr id="11" name="">
             <a:extLst xmlns:a="http://schemas.openxmlformats.org/drawingml/2006/main">
               <a:ext uri="{FF2B5EF4-FFF2-40B4-BE49-F238E27FC236}">
-                <a16:creationId xmlns:a16="http://schemas.microsoft.com/office/drawing/2014/main" id="{4FA4F267-884C-4D9E-92E9-16F4B1070957}"/>
+                <a16:creationId xmlns:a16="http://schemas.microsoft.com/office/drawing/2014/main" id="{4DDC1246-6E4B-4F78-A3C3-5D1B0A2318E1}"/>
               </a:ext>
             </a:extLst>
           </p:cNvPr>
@@ -2396,7 +2396,7 @@
     </p:spTree>
     <p:extLst>
       <p:ext uri="{BB962C8B-B14F-4D97-AF65-F5344CB8AC3E}">
-        <p14:creationId xmlns:p14="http://schemas.microsoft.com/office/powerpoint/2010/main" val="1086413950"/>
+        <p14:creationId xmlns:p14="http://schemas.microsoft.com/office/powerpoint/2010/main" val="2130833361"/>
       </p:ext>
     </p:extLst>
   </p:cSld>
@@ -2427,7 +2427,7 @@
           <p:cNvPr id="14" name="">
             <a:extLst xmlns:a="http://schemas.openxmlformats.org/drawingml/2006/main">
               <a:ext uri="{FF2B5EF4-FFF2-40B4-BE49-F238E27FC236}">
-                <a16:creationId xmlns:a16="http://schemas.microsoft.com/office/drawing/2014/main" id="{D43C6950-6D65-4CF5-89F7-98A18F0941F9}"/>
+                <a16:creationId xmlns:a16="http://schemas.microsoft.com/office/drawing/2014/main" id="{9A11B6C1-4493-4839-BFBA-2DE406BE05D5}"/>
               </a:ext>
             </a:extLst>
           </p:cNvPr>
@@ -2459,7 +2459,7 @@
           <p:cNvPr id="2" name="">
             <a:extLst xmlns:a="http://schemas.openxmlformats.org/drawingml/2006/main">
               <a:ext uri="{FF2B5EF4-FFF2-40B4-BE49-F238E27FC236}">
-                <a16:creationId xmlns:a16="http://schemas.microsoft.com/office/drawing/2014/main" id="{1AA1DD7E-57E3-4D17-BC90-99AE7BD5CCE5}"/>
+                <a16:creationId xmlns:a16="http://schemas.microsoft.com/office/drawing/2014/main" id="{B8B53721-8C7F-4040-93E4-7C78F03F809E}"/>
               </a:ext>
             </a:extLst>
           </p:cNvPr>
@@ -2516,7 +2516,7 @@
           <p:cNvPr id="3" name="">
             <a:extLst xmlns:a="http://schemas.openxmlformats.org/drawingml/2006/main">
               <a:ext uri="{FF2B5EF4-FFF2-40B4-BE49-F238E27FC236}">
-                <a16:creationId xmlns:a16="http://schemas.microsoft.com/office/drawing/2014/main" id="{7E589F7A-9832-4037-B78E-D2BC1BEBCCC9}"/>
+                <a16:creationId xmlns:a16="http://schemas.microsoft.com/office/drawing/2014/main" id="{BD4D3D61-DD05-43C9-9BFA-F29C364DC442}"/>
               </a:ext>
             </a:extLst>
           </p:cNvPr>
@@ -2548,7 +2548,7 @@
           <p:cNvPr id="4" name="">
             <a:extLst xmlns:a="http://schemas.openxmlformats.org/drawingml/2006/main">
               <a:ext uri="{FF2B5EF4-FFF2-40B4-BE49-F238E27FC236}">
-                <a16:creationId xmlns:a16="http://schemas.microsoft.com/office/drawing/2014/main" id="{F262377A-EE3E-4A26-8122-13EA05B3DB2F}"/>
+                <a16:creationId xmlns:a16="http://schemas.microsoft.com/office/drawing/2014/main" id="{54BA0BBE-6898-4FA7-939B-213D3677C64B}"/>
               </a:ext>
             </a:extLst>
           </p:cNvPr>
@@ -2605,7 +2605,7 @@
           <p:cNvPr id="5" name="">
             <a:extLst xmlns:a="http://schemas.openxmlformats.org/drawingml/2006/main">
               <a:ext uri="{FF2B5EF4-FFF2-40B4-BE49-F238E27FC236}">
-                <a16:creationId xmlns:a16="http://schemas.microsoft.com/office/drawing/2014/main" id="{EC8F3A9E-D66A-4A52-93EF-69F22D90DBDB}"/>
+                <a16:creationId xmlns:a16="http://schemas.microsoft.com/office/drawing/2014/main" id="{B494902C-8B19-4D22-888F-0FC512F21DD6}"/>
               </a:ext>
             </a:extLst>
           </p:cNvPr>
@@ -2662,7 +2662,7 @@
           <p:cNvPr id="6" name="">
             <a:extLst xmlns:a="http://schemas.openxmlformats.org/drawingml/2006/main">
               <a:ext uri="{FF2B5EF4-FFF2-40B4-BE49-F238E27FC236}">
-                <a16:creationId xmlns:a16="http://schemas.microsoft.com/office/drawing/2014/main" id="{59D267EB-03BE-48D8-A09B-030EE3211C26}"/>
+                <a16:creationId xmlns:a16="http://schemas.microsoft.com/office/drawing/2014/main" id="{EA473F14-A8EA-406E-AB0E-2B0C05D5D761}"/>
               </a:ext>
             </a:extLst>
           </p:cNvPr>
@@ -2719,7 +2719,7 @@
           <p:cNvPr id="7" name="">
             <a:extLst xmlns:a="http://schemas.openxmlformats.org/drawingml/2006/main">
               <a:ext uri="{FF2B5EF4-FFF2-40B4-BE49-F238E27FC236}">
-                <a16:creationId xmlns:a16="http://schemas.microsoft.com/office/drawing/2014/main" id="{25CA12CD-5943-4BAF-A037-4998799DD5D3}"/>
+                <a16:creationId xmlns:a16="http://schemas.microsoft.com/office/drawing/2014/main" id="{D873050A-782A-433B-BB91-53B813D0E993}"/>
               </a:ext>
             </a:extLst>
           </p:cNvPr>
@@ -2751,7 +2751,7 @@
           <p:cNvPr id="8" name="">
             <a:extLst xmlns:a="http://schemas.openxmlformats.org/drawingml/2006/main">
               <a:ext uri="{FF2B5EF4-FFF2-40B4-BE49-F238E27FC236}">
-                <a16:creationId xmlns:a16="http://schemas.microsoft.com/office/drawing/2014/main" id="{B166D7C3-6AF9-4C82-A3E5-47F6947BED65}"/>
+                <a16:creationId xmlns:a16="http://schemas.microsoft.com/office/drawing/2014/main" id="{B5DAAF81-D110-4657-8385-966C5D56DA36}"/>
               </a:ext>
             </a:extLst>
           </p:cNvPr>
@@ -2808,7 +2808,7 @@
           <p:cNvPr id="9" name="">
             <a:extLst xmlns:a="http://schemas.openxmlformats.org/drawingml/2006/main">
               <a:ext uri="{FF2B5EF4-FFF2-40B4-BE49-F238E27FC236}">
-                <a16:creationId xmlns:a16="http://schemas.microsoft.com/office/drawing/2014/main" id="{C1B7C9FE-B133-4D72-B1AC-104F8EA102DF}"/>
+                <a16:creationId xmlns:a16="http://schemas.microsoft.com/office/drawing/2014/main" id="{E9AC2738-589D-4A41-AE50-E1F403F38571}"/>
               </a:ext>
             </a:extLst>
           </p:cNvPr>
@@ -2865,7 +2865,7 @@
           <p:cNvPr id="10" name="">
             <a:extLst xmlns:a="http://schemas.openxmlformats.org/drawingml/2006/main">
               <a:ext uri="{FF2B5EF4-FFF2-40B4-BE49-F238E27FC236}">
-                <a16:creationId xmlns:a16="http://schemas.microsoft.com/office/drawing/2014/main" id="{11D939F9-BB07-4ACA-94F6-6AA01038033E}"/>
+                <a16:creationId xmlns:a16="http://schemas.microsoft.com/office/drawing/2014/main" id="{DB04DBED-CD93-4CAE-9E65-842A3C97554B}"/>
               </a:ext>
             </a:extLst>
           </p:cNvPr>
@@ -2922,7 +2922,7 @@
           <p:cNvPr id="11" name="">
             <a:extLst xmlns:a="http://schemas.openxmlformats.org/drawingml/2006/main">
               <a:ext uri="{FF2B5EF4-FFF2-40B4-BE49-F238E27FC236}">
-                <a16:creationId xmlns:a16="http://schemas.microsoft.com/office/drawing/2014/main" id="{E96AB8D6-7E88-49EB-B1F5-1731ED81B2E2}"/>
+                <a16:creationId xmlns:a16="http://schemas.microsoft.com/office/drawing/2014/main" id="{7A9691F6-DCB9-44B6-9DCE-5E9524E2BC9F}"/>
               </a:ext>
             </a:extLst>
           </p:cNvPr>
@@ -2979,7 +2979,7 @@
           <p:cNvPr id="12" name="">
             <a:extLst xmlns:a="http://schemas.openxmlformats.org/drawingml/2006/main">
               <a:ext uri="{FF2B5EF4-FFF2-40B4-BE49-F238E27FC236}">
-                <a16:creationId xmlns:a16="http://schemas.microsoft.com/office/drawing/2014/main" id="{BCC08A3D-A4CA-4DF4-AD42-EE89F6E72C25}"/>
+                <a16:creationId xmlns:a16="http://schemas.microsoft.com/office/drawing/2014/main" id="{02AEBEDF-141C-4DDC-BC2E-93FA9977F437}"/>
               </a:ext>
             </a:extLst>
           </p:cNvPr>
@@ -3036,7 +3036,7 @@
           <p:cNvPr id="13" name="">
             <a:extLst xmlns:a="http://schemas.openxmlformats.org/drawingml/2006/main">
               <a:ext uri="{FF2B5EF4-FFF2-40B4-BE49-F238E27FC236}">
-                <a16:creationId xmlns:a16="http://schemas.microsoft.com/office/drawing/2014/main" id="{486227DD-5F17-4ED2-8BDB-6A2681A8C0EF}"/>
+                <a16:creationId xmlns:a16="http://schemas.microsoft.com/office/drawing/2014/main" id="{734559CB-AB6D-46E7-9F3A-D713F8F3BC81}"/>
               </a:ext>
             </a:extLst>
           </p:cNvPr>
@@ -3091,7 +3091,7 @@
     </p:spTree>
     <p:extLst>
       <p:ext uri="{BB962C8B-B14F-4D97-AF65-F5344CB8AC3E}">
-        <p14:creationId xmlns:p14="http://schemas.microsoft.com/office/powerpoint/2010/main" val="1803243139"/>
+        <p14:creationId xmlns:p14="http://schemas.microsoft.com/office/powerpoint/2010/main" val="890747231"/>
       </p:ext>
     </p:extLst>
   </p:cSld>
@@ -3292,7 +3292,7 @@
           <p:cNvPr id="19" name="">
             <a:extLst xmlns:a="http://schemas.openxmlformats.org/drawingml/2006/main">
               <a:ext uri="{FF2B5EF4-FFF2-40B4-BE49-F238E27FC236}">
-                <a16:creationId xmlns:a16="http://schemas.microsoft.com/office/drawing/2014/main" id="{66E22D25-B72B-491F-A846-611175A71D78}"/>
+                <a16:creationId xmlns:a16="http://schemas.microsoft.com/office/drawing/2014/main" id="{E9C4091E-78C4-40A3-8784-445F0DEEB44C}"/>
               </a:ext>
             </a:extLst>
           </p:cNvPr>
@@ -3324,7 +3324,7 @@
           <p:cNvPr id="2" name="">
             <a:extLst xmlns:a="http://schemas.openxmlformats.org/drawingml/2006/main">
               <a:ext uri="{FF2B5EF4-FFF2-40B4-BE49-F238E27FC236}">
-                <a16:creationId xmlns:a16="http://schemas.microsoft.com/office/drawing/2014/main" id="{34B98CFE-FD99-4767-9B04-364982ECA1D6}"/>
+                <a16:creationId xmlns:a16="http://schemas.microsoft.com/office/drawing/2014/main" id="{F3633460-6C38-43C4-A39B-3F632D7D30CD}"/>
               </a:ext>
             </a:extLst>
           </p:cNvPr>
@@ -3381,7 +3381,7 @@
           <p:cNvPr id="3" name="">
             <a:extLst xmlns:a="http://schemas.openxmlformats.org/drawingml/2006/main">
               <a:ext uri="{FF2B5EF4-FFF2-40B4-BE49-F238E27FC236}">
-                <a16:creationId xmlns:a16="http://schemas.microsoft.com/office/drawing/2014/main" id="{459625B6-9ADE-491A-BC9B-D0CED8638776}"/>
+                <a16:creationId xmlns:a16="http://schemas.microsoft.com/office/drawing/2014/main" id="{61B77E9B-3A65-41D6-8079-19C2328BAC5B}"/>
               </a:ext>
             </a:extLst>
           </p:cNvPr>
@@ -3413,7 +3413,7 @@
           <p:cNvPr id="4" name="">
             <a:extLst xmlns:a="http://schemas.openxmlformats.org/drawingml/2006/main">
               <a:ext uri="{FF2B5EF4-FFF2-40B4-BE49-F238E27FC236}">
-                <a16:creationId xmlns:a16="http://schemas.microsoft.com/office/drawing/2014/main" id="{8BB38808-620C-4E59-B9A7-50D73C8501E3}"/>
+                <a16:creationId xmlns:a16="http://schemas.microsoft.com/office/drawing/2014/main" id="{4BBF3437-621E-4A70-8201-8A37CB3E7E44}"/>
               </a:ext>
             </a:extLst>
           </p:cNvPr>
@@ -3470,7 +3470,7 @@
           <p:cNvPr id="5" name="">
             <a:extLst xmlns:a="http://schemas.openxmlformats.org/drawingml/2006/main">
               <a:ext uri="{FF2B5EF4-FFF2-40B4-BE49-F238E27FC236}">
-                <a16:creationId xmlns:a16="http://schemas.microsoft.com/office/drawing/2014/main" id="{B3ADF9EA-469C-4AF3-A540-F78912EF2F91}"/>
+                <a16:creationId xmlns:a16="http://schemas.microsoft.com/office/drawing/2014/main" id="{A9EF0F12-5927-49A0-AD10-BDBA2815B836}"/>
               </a:ext>
             </a:extLst>
           </p:cNvPr>
@@ -3527,7 +3527,7 @@
           <p:cNvPr id="6" name="">
             <a:extLst xmlns:a="http://schemas.openxmlformats.org/drawingml/2006/main">
               <a:ext uri="{FF2B5EF4-FFF2-40B4-BE49-F238E27FC236}">
-                <a16:creationId xmlns:a16="http://schemas.microsoft.com/office/drawing/2014/main" id="{6313E465-5B8B-4B7A-B044-33A6B48489FB}"/>
+                <a16:creationId xmlns:a16="http://schemas.microsoft.com/office/drawing/2014/main" id="{018D8822-00EF-4197-9E20-4D245AF73439}"/>
               </a:ext>
             </a:extLst>
           </p:cNvPr>
@@ -3584,7 +3584,7 @@
           <p:cNvPr id="7" name="">
             <a:extLst xmlns:a="http://schemas.openxmlformats.org/drawingml/2006/main">
               <a:ext uri="{FF2B5EF4-FFF2-40B4-BE49-F238E27FC236}">
-                <a16:creationId xmlns:a16="http://schemas.microsoft.com/office/drawing/2014/main" id="{01F85860-BE84-4055-9D84-493C7FA8A77A}"/>
+                <a16:creationId xmlns:a16="http://schemas.microsoft.com/office/drawing/2014/main" id="{898FE9E7-B8D4-491B-9EF2-7888F38A71F7}"/>
               </a:ext>
             </a:extLst>
           </p:cNvPr>
@@ -3616,7 +3616,7 @@
           <p:cNvPr id="8" name="">
             <a:extLst xmlns:a="http://schemas.openxmlformats.org/drawingml/2006/main">
               <a:ext uri="{FF2B5EF4-FFF2-40B4-BE49-F238E27FC236}">
-                <a16:creationId xmlns:a16="http://schemas.microsoft.com/office/drawing/2014/main" id="{F458CE2F-534C-4004-A40E-371D1726FBAA}"/>
+                <a16:creationId xmlns:a16="http://schemas.microsoft.com/office/drawing/2014/main" id="{790EC86A-C5DC-4542-A2F4-8702C47E8DE0}"/>
               </a:ext>
             </a:extLst>
           </p:cNvPr>
@@ -3673,7 +3673,7 @@
           <p:cNvPr id="9" name="">
             <a:extLst xmlns:a="http://schemas.openxmlformats.org/drawingml/2006/main">
               <a:ext uri="{FF2B5EF4-FFF2-40B4-BE49-F238E27FC236}">
-                <a16:creationId xmlns:a16="http://schemas.microsoft.com/office/drawing/2014/main" id="{8523FBB2-B3C4-4D9E-9354-1DB283D32735}"/>
+                <a16:creationId xmlns:a16="http://schemas.microsoft.com/office/drawing/2014/main" id="{DD5522DC-4128-4FE5-BF05-C8E1F4D0728B}"/>
               </a:ext>
             </a:extLst>
           </p:cNvPr>
@@ -3730,7 +3730,7 @@
           <p:cNvPr id="10" name="">
             <a:extLst xmlns:a="http://schemas.openxmlformats.org/drawingml/2006/main">
               <a:ext uri="{FF2B5EF4-FFF2-40B4-BE49-F238E27FC236}">
-                <a16:creationId xmlns:a16="http://schemas.microsoft.com/office/drawing/2014/main" id="{E92D6106-B4D2-4522-AF7F-B90E7251E696}"/>
+                <a16:creationId xmlns:a16="http://schemas.microsoft.com/office/drawing/2014/main" id="{D910FAF3-9043-4787-9865-9BF9651D5463}"/>
               </a:ext>
             </a:extLst>
           </p:cNvPr>
@@ -3787,7 +3787,7 @@
           <p:cNvPr id="11" name="">
             <a:extLst xmlns:a="http://schemas.openxmlformats.org/drawingml/2006/main">
               <a:ext uri="{FF2B5EF4-FFF2-40B4-BE49-F238E27FC236}">
-                <a16:creationId xmlns:a16="http://schemas.microsoft.com/office/drawing/2014/main" id="{DD4087EE-2C4A-443C-AF35-B78EE4AEDD5D}"/>
+                <a16:creationId xmlns:a16="http://schemas.microsoft.com/office/drawing/2014/main" id="{6A0C0966-9B76-45FC-BE7B-8E0014A55B92}"/>
               </a:ext>
             </a:extLst>
           </p:cNvPr>
@@ -3821,7 +3821,7 @@
           <p:cNvPr id="12" name="">
             <a:extLst xmlns:a="http://schemas.openxmlformats.org/drawingml/2006/main">
               <a:ext uri="{FF2B5EF4-FFF2-40B4-BE49-F238E27FC236}">
-                <a16:creationId xmlns:a16="http://schemas.microsoft.com/office/drawing/2014/main" id="{893DD945-D9E6-4403-B386-63F34F02D3BE}"/>
+                <a16:creationId xmlns:a16="http://schemas.microsoft.com/office/drawing/2014/main" id="{2F61C329-A9A8-47CE-BC64-8B122339ED8B}"/>
               </a:ext>
             </a:extLst>
           </p:cNvPr>
@@ -3878,7 +3878,7 @@
           <p:cNvPr id="13" name="">
             <a:extLst xmlns:a="http://schemas.openxmlformats.org/drawingml/2006/main">
               <a:ext uri="{FF2B5EF4-FFF2-40B4-BE49-F238E27FC236}">
-                <a16:creationId xmlns:a16="http://schemas.microsoft.com/office/drawing/2014/main" id="{B289B5B0-1AE0-4C52-8A49-4A7683031040}"/>
+                <a16:creationId xmlns:a16="http://schemas.microsoft.com/office/drawing/2014/main" id="{FED58D36-B845-4E8A-B73B-16218E412BE2}"/>
               </a:ext>
             </a:extLst>
           </p:cNvPr>
@@ -3935,7 +3935,7 @@
           <p:cNvPr id="14" name="">
             <a:extLst xmlns:a="http://schemas.openxmlformats.org/drawingml/2006/main">
               <a:ext uri="{FF2B5EF4-FFF2-40B4-BE49-F238E27FC236}">
-                <a16:creationId xmlns:a16="http://schemas.microsoft.com/office/drawing/2014/main" id="{1D580A62-988C-445F-902F-3898D56EC76A}"/>
+                <a16:creationId xmlns:a16="http://schemas.microsoft.com/office/drawing/2014/main" id="{26D28D50-8A54-4F60-B0AF-505EB052B44A}"/>
               </a:ext>
             </a:extLst>
           </p:cNvPr>
@@ -3992,7 +3992,7 @@
           <p:cNvPr id="15" name="">
             <a:extLst xmlns:a="http://schemas.openxmlformats.org/drawingml/2006/main">
               <a:ext uri="{FF2B5EF4-FFF2-40B4-BE49-F238E27FC236}">
-                <a16:creationId xmlns:a16="http://schemas.microsoft.com/office/drawing/2014/main" id="{C0747814-8EAD-4DAE-A9B7-EC56AEBD2D7D}"/>
+                <a16:creationId xmlns:a16="http://schemas.microsoft.com/office/drawing/2014/main" id="{0EEB2077-135F-4AF6-A786-1791FB7286A3}"/>
               </a:ext>
             </a:extLst>
           </p:cNvPr>
@@ -4026,7 +4026,7 @@
           <p:cNvPr id="16" name="">
             <a:extLst xmlns:a="http://schemas.openxmlformats.org/drawingml/2006/main">
               <a:ext uri="{FF2B5EF4-FFF2-40B4-BE49-F238E27FC236}">
-                <a16:creationId xmlns:a16="http://schemas.microsoft.com/office/drawing/2014/main" id="{9192ACB0-EE90-42BD-A12A-D08927AF8598}"/>
+                <a16:creationId xmlns:a16="http://schemas.microsoft.com/office/drawing/2014/main" id="{7621A838-791B-4B8B-9D54-3403D8051FB2}"/>
               </a:ext>
             </a:extLst>
           </p:cNvPr>
@@ -4083,7 +4083,7 @@
           <p:cNvPr id="17" name="">
             <a:extLst xmlns:a="http://schemas.openxmlformats.org/drawingml/2006/main">
               <a:ext uri="{FF2B5EF4-FFF2-40B4-BE49-F238E27FC236}">
-                <a16:creationId xmlns:a16="http://schemas.microsoft.com/office/drawing/2014/main" id="{6BDF97F7-E4C5-4E99-BF65-10E079C39156}"/>
+                <a16:creationId xmlns:a16="http://schemas.microsoft.com/office/drawing/2014/main" id="{43381C35-BCAF-43CE-962E-240FF6E7A114}"/>
               </a:ext>
             </a:extLst>
           </p:cNvPr>
@@ -4140,7 +4140,7 @@
           <p:cNvPr id="18" name="">
             <a:extLst xmlns:a="http://schemas.openxmlformats.org/drawingml/2006/main">
               <a:ext uri="{FF2B5EF4-FFF2-40B4-BE49-F238E27FC236}">
-                <a16:creationId xmlns:a16="http://schemas.microsoft.com/office/drawing/2014/main" id="{199F1053-B788-4C07-A47F-9E97A87A466C}"/>
+                <a16:creationId xmlns:a16="http://schemas.microsoft.com/office/drawing/2014/main" id="{1428CFDB-A79E-4828-9772-86CB1B4A8CCA}"/>
               </a:ext>
             </a:extLst>
           </p:cNvPr>
@@ -4195,7 +4195,7 @@
     </p:spTree>
     <p:extLst>
       <p:ext uri="{BB962C8B-B14F-4D97-AF65-F5344CB8AC3E}">
-        <p14:creationId xmlns:p14="http://schemas.microsoft.com/office/powerpoint/2010/main" val="192940551"/>
+        <p14:creationId xmlns:p14="http://schemas.microsoft.com/office/powerpoint/2010/main" val="920265595"/>
       </p:ext>
     </p:extLst>
   </p:cSld>
@@ -4350,7 +4350,7 @@
           <p:cNvPr id="23" name="">
             <a:extLst xmlns:a="http://schemas.openxmlformats.org/drawingml/2006/main">
               <a:ext uri="{FF2B5EF4-FFF2-40B4-BE49-F238E27FC236}">
-                <a16:creationId xmlns:a16="http://schemas.microsoft.com/office/drawing/2014/main" id="{BD5D8711-2189-4CAE-8503-756C66A3D786}"/>
+                <a16:creationId xmlns:a16="http://schemas.microsoft.com/office/drawing/2014/main" id="{95EF370D-3139-4F25-B44F-A83696B9C32F}"/>
               </a:ext>
             </a:extLst>
           </p:cNvPr>
@@ -4382,7 +4382,7 @@
           <p:cNvPr id="2" name="">
             <a:extLst xmlns:a="http://schemas.openxmlformats.org/drawingml/2006/main">
               <a:ext uri="{FF2B5EF4-FFF2-40B4-BE49-F238E27FC236}">
-                <a16:creationId xmlns:a16="http://schemas.microsoft.com/office/drawing/2014/main" id="{43804493-192B-4678-B38B-9A46AAF5846E}"/>
+                <a16:creationId xmlns:a16="http://schemas.microsoft.com/office/drawing/2014/main" id="{C1E84D45-945F-49BB-A9F5-2FA2EE5B63BB}"/>
               </a:ext>
             </a:extLst>
           </p:cNvPr>
@@ -4439,7 +4439,7 @@
           <p:cNvPr id="3" name="">
             <a:extLst xmlns:a="http://schemas.openxmlformats.org/drawingml/2006/main">
               <a:ext uri="{FF2B5EF4-FFF2-40B4-BE49-F238E27FC236}">
-                <a16:creationId xmlns:a16="http://schemas.microsoft.com/office/drawing/2014/main" id="{519E92BE-F1B4-41CF-B4F7-6E11A8189A30}"/>
+                <a16:creationId xmlns:a16="http://schemas.microsoft.com/office/drawing/2014/main" id="{4748E7FF-C860-4959-8AFC-7C7738325C93}"/>
               </a:ext>
             </a:extLst>
           </p:cNvPr>
@@ -4471,7 +4471,7 @@
           <p:cNvPr id="4" name="">
             <a:extLst xmlns:a="http://schemas.openxmlformats.org/drawingml/2006/main">
               <a:ext uri="{FF2B5EF4-FFF2-40B4-BE49-F238E27FC236}">
-                <a16:creationId xmlns:a16="http://schemas.microsoft.com/office/drawing/2014/main" id="{EC3625EE-D2B6-4AD9-B77E-ADC032DEFD8A}"/>
+                <a16:creationId xmlns:a16="http://schemas.microsoft.com/office/drawing/2014/main" id="{82A9A2CC-F88F-46EB-A31B-592F82E73783}"/>
               </a:ext>
             </a:extLst>
           </p:cNvPr>
@@ -4528,7 +4528,7 @@
           <p:cNvPr id="5" name="">
             <a:extLst xmlns:a="http://schemas.openxmlformats.org/drawingml/2006/main">
               <a:ext uri="{FF2B5EF4-FFF2-40B4-BE49-F238E27FC236}">
-                <a16:creationId xmlns:a16="http://schemas.microsoft.com/office/drawing/2014/main" id="{34C6630C-B1BE-49AF-BF3C-745352A3EDE2}"/>
+                <a16:creationId xmlns:a16="http://schemas.microsoft.com/office/drawing/2014/main" id="{03E4607F-9D49-4359-84FB-B298A6A123DB}"/>
               </a:ext>
             </a:extLst>
           </p:cNvPr>
@@ -4585,7 +4585,7 @@
           <p:cNvPr id="6" name="">
             <a:extLst xmlns:a="http://schemas.openxmlformats.org/drawingml/2006/main">
               <a:ext uri="{FF2B5EF4-FFF2-40B4-BE49-F238E27FC236}">
-                <a16:creationId xmlns:a16="http://schemas.microsoft.com/office/drawing/2014/main" id="{28CCC564-3AA4-49DE-9A3A-5A44FF043F8C}"/>
+                <a16:creationId xmlns:a16="http://schemas.microsoft.com/office/drawing/2014/main" id="{CFF26580-62D4-4A12-B6C5-0B59FEC84A5C}"/>
               </a:ext>
             </a:extLst>
           </p:cNvPr>
@@ -4642,7 +4642,7 @@
           <p:cNvPr id="7" name="">
             <a:extLst xmlns:a="http://schemas.openxmlformats.org/drawingml/2006/main">
               <a:ext uri="{FF2B5EF4-FFF2-40B4-BE49-F238E27FC236}">
-                <a16:creationId xmlns:a16="http://schemas.microsoft.com/office/drawing/2014/main" id="{CF14A90A-D3A5-405F-9F8A-6C67C39F4B45}"/>
+                <a16:creationId xmlns:a16="http://schemas.microsoft.com/office/drawing/2014/main" id="{7ED6A41D-826E-47D6-BD27-86744028EFD5}"/>
               </a:ext>
             </a:extLst>
           </p:cNvPr>
@@ -4674,7 +4674,7 @@
           <p:cNvPr id="8" name="">
             <a:extLst xmlns:a="http://schemas.openxmlformats.org/drawingml/2006/main">
               <a:ext uri="{FF2B5EF4-FFF2-40B4-BE49-F238E27FC236}">
-                <a16:creationId xmlns:a16="http://schemas.microsoft.com/office/drawing/2014/main" id="{3ED659F3-6B96-4461-B680-8AA66F82087D}"/>
+                <a16:creationId xmlns:a16="http://schemas.microsoft.com/office/drawing/2014/main" id="{273203AC-EE1F-4C54-B3BC-31C60530793A}"/>
               </a:ext>
             </a:extLst>
           </p:cNvPr>
@@ -4731,7 +4731,7 @@
           <p:cNvPr id="9" name="">
             <a:extLst xmlns:a="http://schemas.openxmlformats.org/drawingml/2006/main">
               <a:ext uri="{FF2B5EF4-FFF2-40B4-BE49-F238E27FC236}">
-                <a16:creationId xmlns:a16="http://schemas.microsoft.com/office/drawing/2014/main" id="{AEE14EE4-23F0-491E-BB15-9B65FA7E7868}"/>
+                <a16:creationId xmlns:a16="http://schemas.microsoft.com/office/drawing/2014/main" id="{A366AAB0-6AF8-4C58-B054-4EA7EC2E82F7}"/>
               </a:ext>
             </a:extLst>
           </p:cNvPr>
@@ -4788,7 +4788,7 @@
           <p:cNvPr id="10" name="">
             <a:extLst xmlns:a="http://schemas.openxmlformats.org/drawingml/2006/main">
               <a:ext uri="{FF2B5EF4-FFF2-40B4-BE49-F238E27FC236}">
-                <a16:creationId xmlns:a16="http://schemas.microsoft.com/office/drawing/2014/main" id="{1428C980-2DA4-4712-B1E6-1EBF10258976}"/>
+                <a16:creationId xmlns:a16="http://schemas.microsoft.com/office/drawing/2014/main" id="{D3C2952B-1AB6-4365-9577-428D0A17FCF4}"/>
               </a:ext>
             </a:extLst>
           </p:cNvPr>
@@ -4822,7 +4822,7 @@
           <p:cNvPr id="11" name="">
             <a:extLst xmlns:a="http://schemas.openxmlformats.org/drawingml/2006/main">
               <a:ext uri="{FF2B5EF4-FFF2-40B4-BE49-F238E27FC236}">
-                <a16:creationId xmlns:a16="http://schemas.microsoft.com/office/drawing/2014/main" id="{E04B99FB-D103-4D5A-BA96-DE1ED79D6626}"/>
+                <a16:creationId xmlns:a16="http://schemas.microsoft.com/office/drawing/2014/main" id="{7FF88525-E885-41C4-B8B8-7BBE2390D485}"/>
               </a:ext>
             </a:extLst>
           </p:cNvPr>
@@ -4854,7 +4854,7 @@
           <p:cNvPr id="12" name="">
             <a:extLst xmlns:a="http://schemas.openxmlformats.org/drawingml/2006/main">
               <a:ext uri="{FF2B5EF4-FFF2-40B4-BE49-F238E27FC236}">
-                <a16:creationId xmlns:a16="http://schemas.microsoft.com/office/drawing/2014/main" id="{E2328E0E-FAEB-4F83-84B0-F81941F6F95E}"/>
+                <a16:creationId xmlns:a16="http://schemas.microsoft.com/office/drawing/2014/main" id="{5301C678-70D8-4AAA-9FB1-808ED03D33F7}"/>
               </a:ext>
             </a:extLst>
           </p:cNvPr>
@@ -4911,7 +4911,7 @@
           <p:cNvPr id="13" name="">
             <a:extLst xmlns:a="http://schemas.openxmlformats.org/drawingml/2006/main">
               <a:ext uri="{FF2B5EF4-FFF2-40B4-BE49-F238E27FC236}">
-                <a16:creationId xmlns:a16="http://schemas.microsoft.com/office/drawing/2014/main" id="{6EC76574-AF48-44B9-9280-2DDAF98D58D3}"/>
+                <a16:creationId xmlns:a16="http://schemas.microsoft.com/office/drawing/2014/main" id="{30D20104-56EF-47AD-A2F3-711B4967973C}"/>
               </a:ext>
             </a:extLst>
           </p:cNvPr>
@@ -4968,7 +4968,7 @@
           <p:cNvPr id="14" name="">
             <a:extLst xmlns:a="http://schemas.openxmlformats.org/drawingml/2006/main">
               <a:ext uri="{FF2B5EF4-FFF2-40B4-BE49-F238E27FC236}">
-                <a16:creationId xmlns:a16="http://schemas.microsoft.com/office/drawing/2014/main" id="{82D9C8A4-5F71-487B-987F-01C574D32EF7}"/>
+                <a16:creationId xmlns:a16="http://schemas.microsoft.com/office/drawing/2014/main" id="{F966AF28-96ED-4F44-95FC-F5FF101536B5}"/>
               </a:ext>
             </a:extLst>
           </p:cNvPr>
@@ -5002,7 +5002,7 @@
           <p:cNvPr id="15" name="">
             <a:extLst xmlns:a="http://schemas.openxmlformats.org/drawingml/2006/main">
               <a:ext uri="{FF2B5EF4-FFF2-40B4-BE49-F238E27FC236}">
-                <a16:creationId xmlns:a16="http://schemas.microsoft.com/office/drawing/2014/main" id="{8B7F2266-0272-4832-8621-325380B63421}"/>
+                <a16:creationId xmlns:a16="http://schemas.microsoft.com/office/drawing/2014/main" id="{A9F2CC1A-85E3-4034-9B38-FFBB39DA7FC7}"/>
               </a:ext>
             </a:extLst>
           </p:cNvPr>
@@ -5034,7 +5034,7 @@
           <p:cNvPr id="16" name="">
             <a:extLst xmlns:a="http://schemas.openxmlformats.org/drawingml/2006/main">
               <a:ext uri="{FF2B5EF4-FFF2-40B4-BE49-F238E27FC236}">
-                <a16:creationId xmlns:a16="http://schemas.microsoft.com/office/drawing/2014/main" id="{285027D3-BFDF-450E-BC0A-E78C4F3E7473}"/>
+                <a16:creationId xmlns:a16="http://schemas.microsoft.com/office/drawing/2014/main" id="{A6699C78-AE23-402E-91FB-946676C48D8F}"/>
               </a:ext>
             </a:extLst>
           </p:cNvPr>
@@ -5091,7 +5091,7 @@
           <p:cNvPr id="17" name="">
             <a:extLst xmlns:a="http://schemas.openxmlformats.org/drawingml/2006/main">
               <a:ext uri="{FF2B5EF4-FFF2-40B4-BE49-F238E27FC236}">
-                <a16:creationId xmlns:a16="http://schemas.microsoft.com/office/drawing/2014/main" id="{100C008F-E4F8-43C9-B9D6-19F45E23F072}"/>
+                <a16:creationId xmlns:a16="http://schemas.microsoft.com/office/drawing/2014/main" id="{A38D3DFA-773E-4C55-896E-0801E45E4A08}"/>
               </a:ext>
             </a:extLst>
           </p:cNvPr>
@@ -5148,7 +5148,7 @@
           <p:cNvPr id="18" name="">
             <a:extLst xmlns:a="http://schemas.openxmlformats.org/drawingml/2006/main">
               <a:ext uri="{FF2B5EF4-FFF2-40B4-BE49-F238E27FC236}">
-                <a16:creationId xmlns:a16="http://schemas.microsoft.com/office/drawing/2014/main" id="{35FC5FF5-5B86-47DD-A001-DE9BF62F3C90}"/>
+                <a16:creationId xmlns:a16="http://schemas.microsoft.com/office/drawing/2014/main" id="{00238F75-77F5-4151-9F9C-5CA32F777BBC}"/>
               </a:ext>
             </a:extLst>
           </p:cNvPr>
@@ -5182,7 +5182,7 @@
           <p:cNvPr id="19" name="">
             <a:extLst xmlns:a="http://schemas.openxmlformats.org/drawingml/2006/main">
               <a:ext uri="{FF2B5EF4-FFF2-40B4-BE49-F238E27FC236}">
-                <a16:creationId xmlns:a16="http://schemas.microsoft.com/office/drawing/2014/main" id="{CE6144B6-0908-4EF8-A4AD-8321E11CBD68}"/>
+                <a16:creationId xmlns:a16="http://schemas.microsoft.com/office/drawing/2014/main" id="{EA605E64-F862-4B51-9DE8-7724331FEE5E}"/>
               </a:ext>
             </a:extLst>
           </p:cNvPr>
@@ -5214,7 +5214,7 @@
           <p:cNvPr id="20" name="">
             <a:extLst xmlns:a="http://schemas.openxmlformats.org/drawingml/2006/main">
               <a:ext uri="{FF2B5EF4-FFF2-40B4-BE49-F238E27FC236}">
-                <a16:creationId xmlns:a16="http://schemas.microsoft.com/office/drawing/2014/main" id="{16318168-6B55-404B-B80D-98F3386C40CB}"/>
+                <a16:creationId xmlns:a16="http://schemas.microsoft.com/office/drawing/2014/main" id="{4382C06B-72E1-405A-9944-32C42844A6D2}"/>
               </a:ext>
             </a:extLst>
           </p:cNvPr>
@@ -5271,7 +5271,7 @@
           <p:cNvPr id="21" name="">
             <a:extLst xmlns:a="http://schemas.openxmlformats.org/drawingml/2006/main">
               <a:ext uri="{FF2B5EF4-FFF2-40B4-BE49-F238E27FC236}">
-                <a16:creationId xmlns:a16="http://schemas.microsoft.com/office/drawing/2014/main" id="{E20C79CB-10FD-4EF5-AB70-6775176A3FFC}"/>
+                <a16:creationId xmlns:a16="http://schemas.microsoft.com/office/drawing/2014/main" id="{997F4C6B-8E99-4CC6-81E2-B90674FC356D}"/>
               </a:ext>
             </a:extLst>
           </p:cNvPr>
@@ -5328,7 +5328,7 @@
           <p:cNvPr id="22" name="">
             <a:extLst xmlns:a="http://schemas.openxmlformats.org/drawingml/2006/main">
               <a:ext uri="{FF2B5EF4-FFF2-40B4-BE49-F238E27FC236}">
-                <a16:creationId xmlns:a16="http://schemas.microsoft.com/office/drawing/2014/main" id="{5694281E-F711-4B46-A2F1-6BADAFF7E83D}"/>
+                <a16:creationId xmlns:a16="http://schemas.microsoft.com/office/drawing/2014/main" id="{A4BE824D-03D1-4D9D-99E6-E78BF810FF8D}"/>
               </a:ext>
             </a:extLst>
           </p:cNvPr>
@@ -5383,7 +5383,7 @@
     </p:spTree>
     <p:extLst>
       <p:ext uri="{BB962C8B-B14F-4D97-AF65-F5344CB8AC3E}">
-        <p14:creationId xmlns:p14="http://schemas.microsoft.com/office/powerpoint/2010/main" val="309211365"/>
+        <p14:creationId xmlns:p14="http://schemas.microsoft.com/office/powerpoint/2010/main" val="126621448"/>
       </p:ext>
     </p:extLst>
   </p:cSld>
@@ -5584,7 +5584,7 @@
           <p:cNvPr id="23" name="">
             <a:extLst xmlns:a="http://schemas.openxmlformats.org/drawingml/2006/main">
               <a:ext uri="{FF2B5EF4-FFF2-40B4-BE49-F238E27FC236}">
-                <a16:creationId xmlns:a16="http://schemas.microsoft.com/office/drawing/2014/main" id="{AA514D78-5F08-4F4B-892A-D46296500B1B}"/>
+                <a16:creationId xmlns:a16="http://schemas.microsoft.com/office/drawing/2014/main" id="{F124A782-8E99-40BC-9387-BC6630957651}"/>
               </a:ext>
             </a:extLst>
           </p:cNvPr>
@@ -5616,7 +5616,7 @@
           <p:cNvPr id="2" name="">
             <a:extLst xmlns:a="http://schemas.openxmlformats.org/drawingml/2006/main">
               <a:ext uri="{FF2B5EF4-FFF2-40B4-BE49-F238E27FC236}">
-                <a16:creationId xmlns:a16="http://schemas.microsoft.com/office/drawing/2014/main" id="{8EE7E3FF-4B0C-4AE0-966A-5F16950EEB1A}"/>
+                <a16:creationId xmlns:a16="http://schemas.microsoft.com/office/drawing/2014/main" id="{415E4F9F-2492-45F3-A34C-24D01AB201C3}"/>
               </a:ext>
             </a:extLst>
           </p:cNvPr>
@@ -5673,7 +5673,7 @@
           <p:cNvPr id="3" name="">
             <a:extLst xmlns:a="http://schemas.openxmlformats.org/drawingml/2006/main">
               <a:ext uri="{FF2B5EF4-FFF2-40B4-BE49-F238E27FC236}">
-                <a16:creationId xmlns:a16="http://schemas.microsoft.com/office/drawing/2014/main" id="{9E77E151-A7AA-4F96-824D-310B48F54113}"/>
+                <a16:creationId xmlns:a16="http://schemas.microsoft.com/office/drawing/2014/main" id="{05820DA7-CBB9-4299-ACF0-80F341CFB665}"/>
               </a:ext>
             </a:extLst>
           </p:cNvPr>
@@ -5705,7 +5705,7 @@
           <p:cNvPr id="4" name="">
             <a:extLst xmlns:a="http://schemas.openxmlformats.org/drawingml/2006/main">
               <a:ext uri="{FF2B5EF4-FFF2-40B4-BE49-F238E27FC236}">
-                <a16:creationId xmlns:a16="http://schemas.microsoft.com/office/drawing/2014/main" id="{02AFE06D-49B9-4ABD-8C31-3C3DE4D4C889}"/>
+                <a16:creationId xmlns:a16="http://schemas.microsoft.com/office/drawing/2014/main" id="{C45B0BFF-DC05-42F3-B8C7-332D69B59F61}"/>
               </a:ext>
             </a:extLst>
           </p:cNvPr>
@@ -5762,7 +5762,7 @@
           <p:cNvPr id="5" name="">
             <a:extLst xmlns:a="http://schemas.openxmlformats.org/drawingml/2006/main">
               <a:ext uri="{FF2B5EF4-FFF2-40B4-BE49-F238E27FC236}">
-                <a16:creationId xmlns:a16="http://schemas.microsoft.com/office/drawing/2014/main" id="{9F620EF0-290C-419D-A454-0C757E58F996}"/>
+                <a16:creationId xmlns:a16="http://schemas.microsoft.com/office/drawing/2014/main" id="{0D4EA20C-22F3-4B37-8B94-4D7855FE55F9}"/>
               </a:ext>
             </a:extLst>
           </p:cNvPr>
@@ -5819,7 +5819,7 @@
           <p:cNvPr id="6" name="">
             <a:extLst xmlns:a="http://schemas.openxmlformats.org/drawingml/2006/main">
               <a:ext uri="{FF2B5EF4-FFF2-40B4-BE49-F238E27FC236}">
-                <a16:creationId xmlns:a16="http://schemas.microsoft.com/office/drawing/2014/main" id="{B37B0F2F-704C-4B81-BDB4-DE10BA25EBDB}"/>
+                <a16:creationId xmlns:a16="http://schemas.microsoft.com/office/drawing/2014/main" id="{DDDE68F1-42C0-46E8-885E-C59AEA7E92C9}"/>
               </a:ext>
             </a:extLst>
           </p:cNvPr>
@@ -5876,7 +5876,7 @@
           <p:cNvPr id="7" name="">
             <a:extLst xmlns:a="http://schemas.openxmlformats.org/drawingml/2006/main">
               <a:ext uri="{FF2B5EF4-FFF2-40B4-BE49-F238E27FC236}">
-                <a16:creationId xmlns:a16="http://schemas.microsoft.com/office/drawing/2014/main" id="{04FAFD5E-0371-4BE6-BC54-E7C9A1C1C14A}"/>
+                <a16:creationId xmlns:a16="http://schemas.microsoft.com/office/drawing/2014/main" id="{F9EBFBDE-79A4-439B-BC21-BF939FC0139D}"/>
               </a:ext>
             </a:extLst>
           </p:cNvPr>
@@ -5908,7 +5908,7 @@
           <p:cNvPr id="8" name="">
             <a:extLst xmlns:a="http://schemas.openxmlformats.org/drawingml/2006/main">
               <a:ext uri="{FF2B5EF4-FFF2-40B4-BE49-F238E27FC236}">
-                <a16:creationId xmlns:a16="http://schemas.microsoft.com/office/drawing/2014/main" id="{B3236069-E664-4488-B22F-A859875123AB}"/>
+                <a16:creationId xmlns:a16="http://schemas.microsoft.com/office/drawing/2014/main" id="{CD8E3B6E-2619-4F7A-B313-638FDDABFDC9}"/>
               </a:ext>
             </a:extLst>
           </p:cNvPr>
@@ -5965,7 +5965,7 @@
           <p:cNvPr id="9" name="">
             <a:extLst xmlns:a="http://schemas.openxmlformats.org/drawingml/2006/main">
               <a:ext uri="{FF2B5EF4-FFF2-40B4-BE49-F238E27FC236}">
-                <a16:creationId xmlns:a16="http://schemas.microsoft.com/office/drawing/2014/main" id="{68C3C83D-C35C-4D66-A896-99E228865C94}"/>
+                <a16:creationId xmlns:a16="http://schemas.microsoft.com/office/drawing/2014/main" id="{EE81E77F-0AC2-4DA1-BA50-CE667E2E824A}"/>
               </a:ext>
             </a:extLst>
           </p:cNvPr>
@@ -6022,7 +6022,7 @@
           <p:cNvPr id="10" name="">
             <a:extLst xmlns:a="http://schemas.openxmlformats.org/drawingml/2006/main">
               <a:ext uri="{FF2B5EF4-FFF2-40B4-BE49-F238E27FC236}">
-                <a16:creationId xmlns:a16="http://schemas.microsoft.com/office/drawing/2014/main" id="{ABF97239-3628-4441-A775-FF2EB7F5B78C}"/>
+                <a16:creationId xmlns:a16="http://schemas.microsoft.com/office/drawing/2014/main" id="{17D56830-8BD1-4F43-8A20-8F15277E7364}"/>
               </a:ext>
             </a:extLst>
           </p:cNvPr>
@@ -6056,7 +6056,7 @@
           <p:cNvPr id="11" name="">
             <a:extLst xmlns:a="http://schemas.openxmlformats.org/drawingml/2006/main">
               <a:ext uri="{FF2B5EF4-FFF2-40B4-BE49-F238E27FC236}">
-                <a16:creationId xmlns:a16="http://schemas.microsoft.com/office/drawing/2014/main" id="{1DA28EB7-C3CC-49C1-B934-087C2ECF0EA9}"/>
+                <a16:creationId xmlns:a16="http://schemas.microsoft.com/office/drawing/2014/main" id="{85CE00DF-F081-4CD3-9750-5A204F1D654A}"/>
               </a:ext>
             </a:extLst>
           </p:cNvPr>
@@ -6088,7 +6088,7 @@
           <p:cNvPr id="12" name="">
             <a:extLst xmlns:a="http://schemas.openxmlformats.org/drawingml/2006/main">
               <a:ext uri="{FF2B5EF4-FFF2-40B4-BE49-F238E27FC236}">
-                <a16:creationId xmlns:a16="http://schemas.microsoft.com/office/drawing/2014/main" id="{2CF74782-A859-40E1-B867-91CE8445DF08}"/>
+                <a16:creationId xmlns:a16="http://schemas.microsoft.com/office/drawing/2014/main" id="{4F42E166-6990-4C27-BD0B-DE2519B122F3}"/>
               </a:ext>
             </a:extLst>
           </p:cNvPr>
@@ -6145,7 +6145,7 @@
           <p:cNvPr id="13" name="">
             <a:extLst xmlns:a="http://schemas.openxmlformats.org/drawingml/2006/main">
               <a:ext uri="{FF2B5EF4-FFF2-40B4-BE49-F238E27FC236}">
-                <a16:creationId xmlns:a16="http://schemas.microsoft.com/office/drawing/2014/main" id="{62768F54-7FB7-45AC-9604-42C2039411AB}"/>
+                <a16:creationId xmlns:a16="http://schemas.microsoft.com/office/drawing/2014/main" id="{56B99731-0125-4A24-82EC-ADB2EEF73568}"/>
               </a:ext>
             </a:extLst>
           </p:cNvPr>
@@ -6202,7 +6202,7 @@
           <p:cNvPr id="14" name="">
             <a:extLst xmlns:a="http://schemas.openxmlformats.org/drawingml/2006/main">
               <a:ext uri="{FF2B5EF4-FFF2-40B4-BE49-F238E27FC236}">
-                <a16:creationId xmlns:a16="http://schemas.microsoft.com/office/drawing/2014/main" id="{759E073A-E72C-4061-8DEB-09AE2F59FE02}"/>
+                <a16:creationId xmlns:a16="http://schemas.microsoft.com/office/drawing/2014/main" id="{5AAADBF5-9E36-4011-AE28-87DE17B18DAE}"/>
               </a:ext>
             </a:extLst>
           </p:cNvPr>
@@ -6236,7 +6236,7 @@
           <p:cNvPr id="15" name="">
             <a:extLst xmlns:a="http://schemas.openxmlformats.org/drawingml/2006/main">
               <a:ext uri="{FF2B5EF4-FFF2-40B4-BE49-F238E27FC236}">
-                <a16:creationId xmlns:a16="http://schemas.microsoft.com/office/drawing/2014/main" id="{7E3D428E-8A09-4D98-8411-36B528359A9B}"/>
+                <a16:creationId xmlns:a16="http://schemas.microsoft.com/office/drawing/2014/main" id="{998F8BB1-4B59-4609-A142-2F98B0B83773}"/>
               </a:ext>
             </a:extLst>
           </p:cNvPr>
@@ -6268,7 +6268,7 @@
           <p:cNvPr id="16" name="">
             <a:extLst xmlns:a="http://schemas.openxmlformats.org/drawingml/2006/main">
               <a:ext uri="{FF2B5EF4-FFF2-40B4-BE49-F238E27FC236}">
-                <a16:creationId xmlns:a16="http://schemas.microsoft.com/office/drawing/2014/main" id="{E7E69007-0A86-45E9-90CB-7A376E4DA83C}"/>
+                <a16:creationId xmlns:a16="http://schemas.microsoft.com/office/drawing/2014/main" id="{5259ADE0-F292-47C6-9F6F-461726E39741}"/>
               </a:ext>
             </a:extLst>
           </p:cNvPr>
@@ -6325,7 +6325,7 @@
           <p:cNvPr id="17" name="">
             <a:extLst xmlns:a="http://schemas.openxmlformats.org/drawingml/2006/main">
               <a:ext uri="{FF2B5EF4-FFF2-40B4-BE49-F238E27FC236}">
-                <a16:creationId xmlns:a16="http://schemas.microsoft.com/office/drawing/2014/main" id="{5D70C54E-8BBB-40A9-A297-842DFCAC00E8}"/>
+                <a16:creationId xmlns:a16="http://schemas.microsoft.com/office/drawing/2014/main" id="{2B3D2329-9493-4BA2-A479-C62063EBAA24}"/>
               </a:ext>
             </a:extLst>
           </p:cNvPr>
@@ -6382,7 +6382,7 @@
           <p:cNvPr id="18" name="">
             <a:extLst xmlns:a="http://schemas.openxmlformats.org/drawingml/2006/main">
               <a:ext uri="{FF2B5EF4-FFF2-40B4-BE49-F238E27FC236}">
-                <a16:creationId xmlns:a16="http://schemas.microsoft.com/office/drawing/2014/main" id="{D96AC91A-1627-4E27-8017-7C546A7ECF19}"/>
+                <a16:creationId xmlns:a16="http://schemas.microsoft.com/office/drawing/2014/main" id="{F84D2A85-B126-474B-8761-A5EB639B96A7}"/>
               </a:ext>
             </a:extLst>
           </p:cNvPr>
@@ -6416,7 +6416,7 @@
           <p:cNvPr id="19" name="">
             <a:extLst xmlns:a="http://schemas.openxmlformats.org/drawingml/2006/main">
               <a:ext uri="{FF2B5EF4-FFF2-40B4-BE49-F238E27FC236}">
-                <a16:creationId xmlns:a16="http://schemas.microsoft.com/office/drawing/2014/main" id="{5D6FEC77-B33B-4E63-9F09-BF7D856F9B11}"/>
+                <a16:creationId xmlns:a16="http://schemas.microsoft.com/office/drawing/2014/main" id="{F9DB13DD-709E-4D7A-B936-715F9797060F}"/>
               </a:ext>
             </a:extLst>
           </p:cNvPr>
@@ -6448,7 +6448,7 @@
           <p:cNvPr id="20" name="">
             <a:extLst xmlns:a="http://schemas.openxmlformats.org/drawingml/2006/main">
               <a:ext uri="{FF2B5EF4-FFF2-40B4-BE49-F238E27FC236}">
-                <a16:creationId xmlns:a16="http://schemas.microsoft.com/office/drawing/2014/main" id="{D58082D5-5D06-424E-896F-76489B760F89}"/>
+                <a16:creationId xmlns:a16="http://schemas.microsoft.com/office/drawing/2014/main" id="{7DDA3EDC-4522-40C2-86EF-A66400A56E72}"/>
               </a:ext>
             </a:extLst>
           </p:cNvPr>
@@ -6505,7 +6505,7 @@
           <p:cNvPr id="21" name="">
             <a:extLst xmlns:a="http://schemas.openxmlformats.org/drawingml/2006/main">
               <a:ext uri="{FF2B5EF4-FFF2-40B4-BE49-F238E27FC236}">
-                <a16:creationId xmlns:a16="http://schemas.microsoft.com/office/drawing/2014/main" id="{F049FFAC-6EC2-495A-B5DD-5AA1683BD2E8}"/>
+                <a16:creationId xmlns:a16="http://schemas.microsoft.com/office/drawing/2014/main" id="{58AC6467-1BEA-4EF5-8E67-C13BBBFD83BD}"/>
               </a:ext>
             </a:extLst>
           </p:cNvPr>
@@ -6562,7 +6562,7 @@
           <p:cNvPr id="22" name="">
             <a:extLst xmlns:a="http://schemas.openxmlformats.org/drawingml/2006/main">
               <a:ext uri="{FF2B5EF4-FFF2-40B4-BE49-F238E27FC236}">
-                <a16:creationId xmlns:a16="http://schemas.microsoft.com/office/drawing/2014/main" id="{F2FBC690-3330-4154-9598-520FEA932FC1}"/>
+                <a16:creationId xmlns:a16="http://schemas.microsoft.com/office/drawing/2014/main" id="{91E2F848-0C0A-4107-8AD9-1951F47B0BEF}"/>
               </a:ext>
             </a:extLst>
           </p:cNvPr>
@@ -6617,7 +6617,7 @@
     </p:spTree>
     <p:extLst>
       <p:ext uri="{BB962C8B-B14F-4D97-AF65-F5344CB8AC3E}">
-        <p14:creationId xmlns:p14="http://schemas.microsoft.com/office/powerpoint/2010/main" val="406877551"/>
+        <p14:creationId xmlns:p14="http://schemas.microsoft.com/office/powerpoint/2010/main" val="1779653552"/>
       </p:ext>
     </p:extLst>
   </p:cSld>
@@ -6818,7 +6818,7 @@
           <p:cNvPr id="16" name="">
             <a:extLst xmlns:a="http://schemas.openxmlformats.org/drawingml/2006/main">
               <a:ext uri="{FF2B5EF4-FFF2-40B4-BE49-F238E27FC236}">
-                <a16:creationId xmlns:a16="http://schemas.microsoft.com/office/drawing/2014/main" id="{12C35EC8-6039-403A-8702-AAB4A72588B5}"/>
+                <a16:creationId xmlns:a16="http://schemas.microsoft.com/office/drawing/2014/main" id="{2FFCA0D0-6ADE-4F4B-A175-0AD251FD72F5}"/>
               </a:ext>
             </a:extLst>
           </p:cNvPr>
@@ -6850,7 +6850,7 @@
           <p:cNvPr id="2" name="">
             <a:extLst xmlns:a="http://schemas.openxmlformats.org/drawingml/2006/main">
               <a:ext uri="{FF2B5EF4-FFF2-40B4-BE49-F238E27FC236}">
-                <a16:creationId xmlns:a16="http://schemas.microsoft.com/office/drawing/2014/main" id="{FA6C82EB-7073-42E5-8373-15BE21EB2790}"/>
+                <a16:creationId xmlns:a16="http://schemas.microsoft.com/office/drawing/2014/main" id="{EE3443B5-3AEE-4ADC-BA3B-4EA3A86A9E9F}"/>
               </a:ext>
             </a:extLst>
           </p:cNvPr>
@@ -6907,7 +6907,7 @@
           <p:cNvPr id="3" name="">
             <a:extLst xmlns:a="http://schemas.openxmlformats.org/drawingml/2006/main">
               <a:ext uri="{FF2B5EF4-FFF2-40B4-BE49-F238E27FC236}">
-                <a16:creationId xmlns:a16="http://schemas.microsoft.com/office/drawing/2014/main" id="{31C12331-2CDC-49FC-9C90-18B0AA6A638F}"/>
+                <a16:creationId xmlns:a16="http://schemas.microsoft.com/office/drawing/2014/main" id="{1A2283FE-FDAB-4B5E-A69B-733094289E97}"/>
               </a:ext>
             </a:extLst>
           </p:cNvPr>
@@ -6939,7 +6939,7 @@
           <p:cNvPr id="4" name="">
             <a:extLst xmlns:a="http://schemas.openxmlformats.org/drawingml/2006/main">
               <a:ext uri="{FF2B5EF4-FFF2-40B4-BE49-F238E27FC236}">
-                <a16:creationId xmlns:a16="http://schemas.microsoft.com/office/drawing/2014/main" id="{C615F5C2-AEA1-42A6-B783-406D2C144344}"/>
+                <a16:creationId xmlns:a16="http://schemas.microsoft.com/office/drawing/2014/main" id="{0CEE838A-21AF-4B63-AAF4-63ED142C2F83}"/>
               </a:ext>
             </a:extLst>
           </p:cNvPr>
@@ -6996,7 +6996,7 @@
           <p:cNvPr id="5" name="">
             <a:extLst xmlns:a="http://schemas.openxmlformats.org/drawingml/2006/main">
               <a:ext uri="{FF2B5EF4-FFF2-40B4-BE49-F238E27FC236}">
-                <a16:creationId xmlns:a16="http://schemas.microsoft.com/office/drawing/2014/main" id="{DD321D5B-F545-4D74-88EB-0717E54066A9}"/>
+                <a16:creationId xmlns:a16="http://schemas.microsoft.com/office/drawing/2014/main" id="{F0CDBEDA-C8BC-4126-93E4-C503E4B0004F}"/>
               </a:ext>
             </a:extLst>
           </p:cNvPr>
@@ -7053,7 +7053,7 @@
           <p:cNvPr id="6" name="">
             <a:extLst xmlns:a="http://schemas.openxmlformats.org/drawingml/2006/main">
               <a:ext uri="{FF2B5EF4-FFF2-40B4-BE49-F238E27FC236}">
-                <a16:creationId xmlns:a16="http://schemas.microsoft.com/office/drawing/2014/main" id="{0380099F-F38F-4A9D-A329-10AF0B3C5382}"/>
+                <a16:creationId xmlns:a16="http://schemas.microsoft.com/office/drawing/2014/main" id="{DE3BEAFC-B202-4936-98B7-6F36596B8F9D}"/>
               </a:ext>
             </a:extLst>
           </p:cNvPr>
@@ -7110,7 +7110,7 @@
           <p:cNvPr id="7" name="">
             <a:extLst xmlns:a="http://schemas.openxmlformats.org/drawingml/2006/main">
               <a:ext uri="{FF2B5EF4-FFF2-40B4-BE49-F238E27FC236}">
-                <a16:creationId xmlns:a16="http://schemas.microsoft.com/office/drawing/2014/main" id="{B4F1778C-1ADA-4D1D-A9C3-92FC647B41B1}"/>
+                <a16:creationId xmlns:a16="http://schemas.microsoft.com/office/drawing/2014/main" id="{5AF9CD95-23BA-4702-ADB0-EB93F6A09855}"/>
               </a:ext>
             </a:extLst>
           </p:cNvPr>
@@ -7142,7 +7142,7 @@
           <p:cNvPr id="8" name="">
             <a:extLst xmlns:a="http://schemas.openxmlformats.org/drawingml/2006/main">
               <a:ext uri="{FF2B5EF4-FFF2-40B4-BE49-F238E27FC236}">
-                <a16:creationId xmlns:a16="http://schemas.microsoft.com/office/drawing/2014/main" id="{5557848B-728F-410E-8531-33E0C0873D61}"/>
+                <a16:creationId xmlns:a16="http://schemas.microsoft.com/office/drawing/2014/main" id="{93A50D41-F0E5-49C6-A09C-01D0F0013F67}"/>
               </a:ext>
             </a:extLst>
           </p:cNvPr>
@@ -7199,7 +7199,7 @@
           <p:cNvPr id="9" name="">
             <a:extLst xmlns:a="http://schemas.openxmlformats.org/drawingml/2006/main">
               <a:ext uri="{FF2B5EF4-FFF2-40B4-BE49-F238E27FC236}">
-                <a16:creationId xmlns:a16="http://schemas.microsoft.com/office/drawing/2014/main" id="{9B2A8FF4-C044-48C6-BA37-4D7E72B29960}"/>
+                <a16:creationId xmlns:a16="http://schemas.microsoft.com/office/drawing/2014/main" id="{EBD12F11-21CF-4963-90FA-5C69CE2F2AEC}"/>
               </a:ext>
             </a:extLst>
           </p:cNvPr>
@@ -7256,7 +7256,7 @@
           <p:cNvPr id="10" name="">
             <a:extLst xmlns:a="http://schemas.openxmlformats.org/drawingml/2006/main">
               <a:ext uri="{FF2B5EF4-FFF2-40B4-BE49-F238E27FC236}">
-                <a16:creationId xmlns:a16="http://schemas.microsoft.com/office/drawing/2014/main" id="{5198AB09-3229-4A83-A3AA-58A47EE2B68C}"/>
+                <a16:creationId xmlns:a16="http://schemas.microsoft.com/office/drawing/2014/main" id="{681AB2BD-FD86-4E70-BBA4-C5F70BDBB1C9}"/>
               </a:ext>
             </a:extLst>
           </p:cNvPr>
@@ -7313,7 +7313,7 @@
           <p:cNvPr id="11" name="">
             <a:extLst xmlns:a="http://schemas.openxmlformats.org/drawingml/2006/main">
               <a:ext uri="{FF2B5EF4-FFF2-40B4-BE49-F238E27FC236}">
-                <a16:creationId xmlns:a16="http://schemas.microsoft.com/office/drawing/2014/main" id="{ACBFFFD6-5682-45B5-B06E-FB5F180EBD66}"/>
+                <a16:creationId xmlns:a16="http://schemas.microsoft.com/office/drawing/2014/main" id="{ACED4FDA-3941-4C7D-BE7E-3FC866017487}"/>
               </a:ext>
             </a:extLst>
           </p:cNvPr>
@@ -7345,7 +7345,7 @@
           <p:cNvPr id="12" name="">
             <a:extLst xmlns:a="http://schemas.openxmlformats.org/drawingml/2006/main">
               <a:ext uri="{FF2B5EF4-FFF2-40B4-BE49-F238E27FC236}">
-                <a16:creationId xmlns:a16="http://schemas.microsoft.com/office/drawing/2014/main" id="{C8E9F07C-5F3C-481E-A208-FD2C4CDFFDA0}"/>
+                <a16:creationId xmlns:a16="http://schemas.microsoft.com/office/drawing/2014/main" id="{6CFDB7CF-9667-4B9B-84EE-A85FFE65C2AA}"/>
               </a:ext>
             </a:extLst>
           </p:cNvPr>
@@ -7402,7 +7402,7 @@
           <p:cNvPr id="13" name="">
             <a:extLst xmlns:a="http://schemas.openxmlformats.org/drawingml/2006/main">
               <a:ext uri="{FF2B5EF4-FFF2-40B4-BE49-F238E27FC236}">
-                <a16:creationId xmlns:a16="http://schemas.microsoft.com/office/drawing/2014/main" id="{CC772A6B-A02F-498B-8EBD-42C398086DCF}"/>
+                <a16:creationId xmlns:a16="http://schemas.microsoft.com/office/drawing/2014/main" id="{1A850AB4-7D36-4998-B187-4F788ED6B04A}"/>
               </a:ext>
             </a:extLst>
           </p:cNvPr>
@@ -7459,7 +7459,7 @@
           <p:cNvPr id="14" name="">
             <a:extLst xmlns:a="http://schemas.openxmlformats.org/drawingml/2006/main">
               <a:ext uri="{FF2B5EF4-FFF2-40B4-BE49-F238E27FC236}">
-                <a16:creationId xmlns:a16="http://schemas.microsoft.com/office/drawing/2014/main" id="{19990720-991C-498C-B776-BF3651FA7646}"/>
+                <a16:creationId xmlns:a16="http://schemas.microsoft.com/office/drawing/2014/main" id="{D0CDA511-7D57-4F9C-8BA2-814B7D1E41A8}"/>
               </a:ext>
             </a:extLst>
           </p:cNvPr>
@@ -7516,7 +7516,7 @@
           <p:cNvPr id="15" name="">
             <a:extLst xmlns:a="http://schemas.openxmlformats.org/drawingml/2006/main">
               <a:ext uri="{FF2B5EF4-FFF2-40B4-BE49-F238E27FC236}">
-                <a16:creationId xmlns:a16="http://schemas.microsoft.com/office/drawing/2014/main" id="{E750B474-263F-4FAA-B267-FE8037CC1996}"/>
+                <a16:creationId xmlns:a16="http://schemas.microsoft.com/office/drawing/2014/main" id="{FF8B9CCE-012A-4F0A-8B08-80A88B06290B}"/>
               </a:ext>
             </a:extLst>
           </p:cNvPr>
@@ -7571,7 +7571,7 @@
     </p:spTree>
     <p:extLst>
       <p:ext uri="{BB962C8B-B14F-4D97-AF65-F5344CB8AC3E}">
-        <p14:creationId xmlns:p14="http://schemas.microsoft.com/office/powerpoint/2010/main" val="882216919"/>
+        <p14:creationId xmlns:p14="http://schemas.microsoft.com/office/powerpoint/2010/main" val="1342374537"/>
       </p:ext>
     </p:extLst>
   </p:cSld>
@@ -7769,10 +7769,10 @@
       </p:grpSpPr>
       <p:sp>
         <p:nvSpPr>
-          <p:cNvPr id="23" name="">
-            <a:extLst xmlns:a="http://schemas.openxmlformats.org/drawingml/2006/main">
-              <a:ext uri="{FF2B5EF4-FFF2-40B4-BE49-F238E27FC236}">
-                <a16:creationId xmlns:a16="http://schemas.microsoft.com/office/drawing/2014/main" id="{CD93C84E-8EE8-4B39-889D-B4942D87AAB1}"/>
+          <p:cNvPr id="26" name="">
+            <a:extLst xmlns:a="http://schemas.openxmlformats.org/drawingml/2006/main">
+              <a:ext uri="{FF2B5EF4-FFF2-40B4-BE49-F238E27FC236}">
+                <a16:creationId xmlns:a16="http://schemas.microsoft.com/office/drawing/2014/main" id="{8D76EDAC-950A-49F7-BE9D-15CEFD268022}"/>
               </a:ext>
             </a:extLst>
           </p:cNvPr>
@@ -7804,7 +7804,7 @@
           <p:cNvPr id="2" name="">
             <a:extLst xmlns:a="http://schemas.openxmlformats.org/drawingml/2006/main">
               <a:ext uri="{FF2B5EF4-FFF2-40B4-BE49-F238E27FC236}">
-                <a16:creationId xmlns:a16="http://schemas.microsoft.com/office/drawing/2014/main" id="{6571138E-281C-403E-A54F-07BBF02F35F5}"/>
+                <a16:creationId xmlns:a16="http://schemas.microsoft.com/office/drawing/2014/main" id="{E043B4D3-2BC8-4831-AEE5-5D22907DAD2E}"/>
               </a:ext>
             </a:extLst>
           </p:cNvPr>
@@ -7861,7 +7861,7 @@
           <p:cNvPr id="3" name="">
             <a:extLst xmlns:a="http://schemas.openxmlformats.org/drawingml/2006/main">
               <a:ext uri="{FF2B5EF4-FFF2-40B4-BE49-F238E27FC236}">
-                <a16:creationId xmlns:a16="http://schemas.microsoft.com/office/drawing/2014/main" id="{8CE980EB-CBA0-425A-9463-C864A17BC4CD}"/>
+                <a16:creationId xmlns:a16="http://schemas.microsoft.com/office/drawing/2014/main" id="{5AEFDA4B-C652-4A5C-B361-FB999A0DAAFB}"/>
               </a:ext>
             </a:extLst>
           </p:cNvPr>
@@ -7893,7 +7893,7 @@
           <p:cNvPr id="4" name="">
             <a:extLst xmlns:a="http://schemas.openxmlformats.org/drawingml/2006/main">
               <a:ext uri="{FF2B5EF4-FFF2-40B4-BE49-F238E27FC236}">
-                <a16:creationId xmlns:a16="http://schemas.microsoft.com/office/drawing/2014/main" id="{171D8D50-15C3-4703-8CED-2C4FFEE63E67}"/>
+                <a16:creationId xmlns:a16="http://schemas.microsoft.com/office/drawing/2014/main" id="{174A14EC-33CE-444F-96AE-9A7B197356D7}"/>
               </a:ext>
             </a:extLst>
           </p:cNvPr>
@@ -7950,7 +7950,7 @@
           <p:cNvPr id="5" name="">
             <a:extLst xmlns:a="http://schemas.openxmlformats.org/drawingml/2006/main">
               <a:ext uri="{FF2B5EF4-FFF2-40B4-BE49-F238E27FC236}">
-                <a16:creationId xmlns:a16="http://schemas.microsoft.com/office/drawing/2014/main" id="{F03DC6DC-87EF-42CB-8BC6-63D2EDECF85F}"/>
+                <a16:creationId xmlns:a16="http://schemas.microsoft.com/office/drawing/2014/main" id="{1CBC8F08-6609-453D-95FA-DB0E7EC4DADA}"/>
               </a:ext>
             </a:extLst>
           </p:cNvPr>
@@ -8007,7 +8007,7 @@
           <p:cNvPr id="6" name="">
             <a:extLst xmlns:a="http://schemas.openxmlformats.org/drawingml/2006/main">
               <a:ext uri="{FF2B5EF4-FFF2-40B4-BE49-F238E27FC236}">
-                <a16:creationId xmlns:a16="http://schemas.microsoft.com/office/drawing/2014/main" id="{C49530B2-D50E-4AED-A26A-FEA94D4D7464}"/>
+                <a16:creationId xmlns:a16="http://schemas.microsoft.com/office/drawing/2014/main" id="{F1FF2D44-4E16-4B09-A1CE-6CD020C9CAFD}"/>
               </a:ext>
             </a:extLst>
           </p:cNvPr>
@@ -8064,7 +8064,7 @@
           <p:cNvPr id="7" name="">
             <a:extLst xmlns:a="http://schemas.openxmlformats.org/drawingml/2006/main">
               <a:ext uri="{FF2B5EF4-FFF2-40B4-BE49-F238E27FC236}">
-                <a16:creationId xmlns:a16="http://schemas.microsoft.com/office/drawing/2014/main" id="{E88F7CEE-28DB-4F61-931C-8EF110DC00E8}"/>
+                <a16:creationId xmlns:a16="http://schemas.microsoft.com/office/drawing/2014/main" id="{8C9B8960-1F9B-431D-A59E-59F47A5819E1}"/>
               </a:ext>
             </a:extLst>
           </p:cNvPr>
@@ -8096,7 +8096,7 @@
           <p:cNvPr id="8" name="">
             <a:extLst xmlns:a="http://schemas.openxmlformats.org/drawingml/2006/main">
               <a:ext uri="{FF2B5EF4-FFF2-40B4-BE49-F238E27FC236}">
-                <a16:creationId xmlns:a16="http://schemas.microsoft.com/office/drawing/2014/main" id="{2077DABD-7DD6-418E-A88B-ED9696A1D4C7}"/>
+                <a16:creationId xmlns:a16="http://schemas.microsoft.com/office/drawing/2014/main" id="{263FB6DA-B7BE-4846-8CD4-53C1288A0580}"/>
               </a:ext>
             </a:extLst>
           </p:cNvPr>
@@ -8153,7 +8153,7 @@
           <p:cNvPr id="9" name="">
             <a:extLst xmlns:a="http://schemas.openxmlformats.org/drawingml/2006/main">
               <a:ext uri="{FF2B5EF4-FFF2-40B4-BE49-F238E27FC236}">
-                <a16:creationId xmlns:a16="http://schemas.microsoft.com/office/drawing/2014/main" id="{96252BEC-7835-4986-B139-0278CE63D5EB}"/>
+                <a16:creationId xmlns:a16="http://schemas.microsoft.com/office/drawing/2014/main" id="{0DA7DD1A-59E9-49E4-9A0A-21AA96EF6C29}"/>
               </a:ext>
             </a:extLst>
           </p:cNvPr>
@@ -8210,19 +8210,19 @@
           <p:cNvPr id="10" name="">
             <a:extLst xmlns:a="http://schemas.openxmlformats.org/drawingml/2006/main">
               <a:ext uri="{FF2B5EF4-FFF2-40B4-BE49-F238E27FC236}">
-                <a16:creationId xmlns:a16="http://schemas.microsoft.com/office/drawing/2014/main" id="{96F2FFB8-D3C4-4D09-BD2D-3DA6234FAF66}"/>
-              </a:ext>
-            </a:extLst>
-          </p:cNvPr>
-          <p:cNvSpPr>
-            <a:spLocks xmlns:a="http://schemas.openxmlformats.org/drawingml/2006/main" noGrp="1"/>
-          </p:cNvSpPr>
-          <p:nvPr/>
-        </p:nvSpPr>
-        <p:spPr>
-          <a:xfrm xmlns:a="http://schemas.openxmlformats.org/drawingml/2006/main">
-            <a:off x="914400" y="1257300"/>
-            <a:ext cx="10363200" cy="781050"/>
+                <a16:creationId xmlns:a16="http://schemas.microsoft.com/office/drawing/2014/main" id="{46C78CA0-B8D8-4821-9749-1EF2FF12BEA6}"/>
+              </a:ext>
+            </a:extLst>
+          </p:cNvPr>
+          <p:cNvSpPr>
+            <a:spLocks xmlns:a="http://schemas.openxmlformats.org/drawingml/2006/main" noGrp="1"/>
+          </p:cNvSpPr>
+          <p:nvPr/>
+        </p:nvSpPr>
+        <p:spPr>
+          <a:xfrm xmlns:a="http://schemas.openxmlformats.org/drawingml/2006/main">
+            <a:off x="857250" y="1219200"/>
+            <a:ext cx="10477500" cy="742950"/>
           </a:xfrm>
           <a:prstGeom xmlns:a="http://schemas.openxmlformats.org/drawingml/2006/main" prst="rect">
             <a:avLst/>
@@ -8239,7 +8239,7 @@
           <a:lstStyle xmlns:a="http://schemas.openxmlformats.org/drawingml/2006/main"/>
           <a:p xmlns:a="http://schemas.openxmlformats.org/drawingml/2006/main">
             <a:pPr algn="ctr">
-              <a:defRPr sz="2175" b="1">
+              <a:defRPr sz="2100" b="1">
                 <a:solidFill>
                   <a:srgbClr val="17253A"/>
                 </a:solidFill>
@@ -8249,7 +8249,7 @@
               </a:defRPr>
             </a:pPr>
             <a:r>
-              <a:rPr sz="2175" b="1">
+              <a:rPr sz="2100" b="1">
                 <a:solidFill>
                   <a:srgbClr val="17253A"/>
                 </a:solidFill>
@@ -8267,28 +8267,30 @@
           <p:cNvPr id="11" name="">
             <a:extLst xmlns:a="http://schemas.openxmlformats.org/drawingml/2006/main">
               <a:ext uri="{FF2B5EF4-FFF2-40B4-BE49-F238E27FC236}">
-                <a16:creationId xmlns:a16="http://schemas.microsoft.com/office/drawing/2014/main" id="{FBEC0734-D765-4CD5-9CB8-6526FAFAD9F0}"/>
-              </a:ext>
-            </a:extLst>
-          </p:cNvPr>
-          <p:cNvSpPr>
-            <a:spLocks xmlns:a="http://schemas.openxmlformats.org/drawingml/2006/main" noGrp="1"/>
-          </p:cNvSpPr>
-          <p:nvPr/>
-        </p:nvSpPr>
-        <p:spPr>
-          <a:xfrm xmlns:a="http://schemas.openxmlformats.org/drawingml/2006/main">
-            <a:off x="1000125" y="2247900"/>
-            <a:ext cx="476250" cy="476250"/>
-          </a:xfrm>
-          <a:prstGeom xmlns:a="http://schemas.openxmlformats.org/drawingml/2006/main" prst="ellipse">
+                <a16:creationId xmlns:a16="http://schemas.microsoft.com/office/drawing/2014/main" id="{CE3A1FAF-BA8C-4234-8D25-8294B6C67792}"/>
+              </a:ext>
+            </a:extLst>
+          </p:cNvPr>
+          <p:cNvSpPr>
+            <a:spLocks xmlns:a="http://schemas.openxmlformats.org/drawingml/2006/main" noGrp="1"/>
+          </p:cNvSpPr>
+          <p:nvPr/>
+        </p:nvSpPr>
+        <p:spPr>
+          <a:xfrm xmlns:a="http://schemas.openxmlformats.org/drawingml/2006/main">
+            <a:off x="971550" y="2124075"/>
+            <a:ext cx="38100" cy="3524250"/>
+          </a:xfrm>
+          <a:prstGeom xmlns:a="http://schemas.openxmlformats.org/drawingml/2006/main" prst="rect">
             <a:avLst/>
           </a:prstGeom>
           <a:solidFill xmlns:a="http://schemas.openxmlformats.org/drawingml/2006/main">
-            <a:srgbClr val="18324A"/>
+            <a:srgbClr val="2C6E73"/>
           </a:solidFill>
           <a:ln xmlns:a="http://schemas.openxmlformats.org/drawingml/2006/main" w="0">
-            <a:noFill/>
+            <a:solidFill>
+              <a:srgbClr val="2C6E73"/>
+            </a:solidFill>
           </a:ln>
         </p:spPr>
       </p:sp>
@@ -8297,19 +8299,19 @@
           <p:cNvPr id="12" name="">
             <a:extLst xmlns:a="http://schemas.openxmlformats.org/drawingml/2006/main">
               <a:ext uri="{FF2B5EF4-FFF2-40B4-BE49-F238E27FC236}">
-                <a16:creationId xmlns:a16="http://schemas.microsoft.com/office/drawing/2014/main" id="{088971BF-FC1E-4642-A16B-B729A33DC439}"/>
-              </a:ext>
-            </a:extLst>
-          </p:cNvPr>
-          <p:cNvSpPr>
-            <a:spLocks xmlns:a="http://schemas.openxmlformats.org/drawingml/2006/main" noGrp="1"/>
-          </p:cNvSpPr>
-          <p:nvPr/>
-        </p:nvSpPr>
-        <p:spPr>
-          <a:xfrm xmlns:a="http://schemas.openxmlformats.org/drawingml/2006/main">
-            <a:off x="1000125" y="2276475"/>
-            <a:ext cx="476250" cy="419100"/>
+                <a16:creationId xmlns:a16="http://schemas.microsoft.com/office/drawing/2014/main" id="{A21393EF-B206-43F7-8022-C8B4403E01E0}"/>
+              </a:ext>
+            </a:extLst>
+          </p:cNvPr>
+          <p:cNvSpPr>
+            <a:spLocks xmlns:a="http://schemas.openxmlformats.org/drawingml/2006/main" noGrp="1"/>
+          </p:cNvSpPr>
+          <p:nvPr/>
+        </p:nvSpPr>
+        <p:spPr>
+          <a:xfrm xmlns:a="http://schemas.openxmlformats.org/drawingml/2006/main">
+            <a:off x="1162050" y="2200275"/>
+            <a:ext cx="400050" cy="400050"/>
           </a:xfrm>
           <a:prstGeom xmlns:a="http://schemas.openxmlformats.org/drawingml/2006/main" prst="rect">
             <a:avLst/>
@@ -8326,9 +8328,9 @@
           <a:lstStyle xmlns:a="http://schemas.openxmlformats.org/drawingml/2006/main"/>
           <a:p xmlns:a="http://schemas.openxmlformats.org/drawingml/2006/main">
             <a:pPr algn="ctr">
-              <a:defRPr sz="1350" b="1">
-                <a:solidFill>
-                  <a:srgbClr val="FFFFFF"/>
+              <a:defRPr sz="1125" b="1">
+                <a:solidFill>
+                  <a:srgbClr val="2C6E73"/>
                 </a:solidFill>
                 <a:latin typeface="Arial"/>
                 <a:ea typeface="Arial"/>
@@ -8336,9 +8338,9 @@
               </a:defRPr>
             </a:pPr>
             <a:r>
-              <a:rPr sz="1350" b="1">
-                <a:solidFill>
-                  <a:srgbClr val="FFFFFF"/>
+              <a:rPr sz="1125" b="1">
+                <a:solidFill>
+                  <a:srgbClr val="2C6E73"/>
                 </a:solidFill>
                 <a:latin typeface="Arial"/>
                 <a:ea typeface="Arial"/>
@@ -8354,19 +8356,19 @@
           <p:cNvPr id="13" name="">
             <a:extLst xmlns:a="http://schemas.openxmlformats.org/drawingml/2006/main">
               <a:ext uri="{FF2B5EF4-FFF2-40B4-BE49-F238E27FC236}">
-                <a16:creationId xmlns:a16="http://schemas.microsoft.com/office/drawing/2014/main" id="{7FE13221-7CDF-4A88-8781-FB8F70F47A26}"/>
-              </a:ext>
-            </a:extLst>
-          </p:cNvPr>
-          <p:cNvSpPr>
-            <a:spLocks xmlns:a="http://schemas.openxmlformats.org/drawingml/2006/main" noGrp="1"/>
-          </p:cNvSpPr>
-          <p:nvPr/>
-        </p:nvSpPr>
-        <p:spPr>
-          <a:xfrm xmlns:a="http://schemas.openxmlformats.org/drawingml/2006/main">
-            <a:off x="1714500" y="2181225"/>
-            <a:ext cx="9429750" cy="609600"/>
+                <a16:creationId xmlns:a16="http://schemas.microsoft.com/office/drawing/2014/main" id="{AEA61044-919F-49CC-AD2F-770A161B289F}"/>
+              </a:ext>
+            </a:extLst>
+          </p:cNvPr>
+          <p:cNvSpPr>
+            <a:spLocks xmlns:a="http://schemas.openxmlformats.org/drawingml/2006/main" noGrp="1"/>
+          </p:cNvSpPr>
+          <p:nvPr/>
+        </p:nvSpPr>
+        <p:spPr>
+          <a:xfrm xmlns:a="http://schemas.openxmlformats.org/drawingml/2006/main">
+            <a:off x="1714500" y="2114550"/>
+            <a:ext cx="9525000" cy="638175"/>
           </a:xfrm>
           <a:prstGeom xmlns:a="http://schemas.openxmlformats.org/drawingml/2006/main" prst="rect">
             <a:avLst/>
@@ -8383,7 +8385,7 @@
           <a:lstStyle xmlns:a="http://schemas.openxmlformats.org/drawingml/2006/main"/>
           <a:p xmlns:a="http://schemas.openxmlformats.org/drawingml/2006/main">
             <a:pPr algn="l">
-              <a:defRPr sz="1500" b="0">
+              <a:defRPr sz="1575" b="0">
                 <a:solidFill>
                   <a:srgbClr val="17253A"/>
                 </a:solidFill>
@@ -8393,7 +8395,7 @@
               </a:defRPr>
             </a:pPr>
             <a:r>
-              <a:rPr sz="1500" b="0">
+              <a:rPr sz="1575" b="0">
                 <a:solidFill>
                   <a:srgbClr val="17253A"/>
                 </a:solidFill>
@@ -8401,7 +8403,7 @@
                 <a:ea typeface="Arial"/>
                 <a:cs typeface="Arial"/>
               </a:rPr>
-              <a:t>Identify the structure: Retrieve the relevant fact or method before answering.</a:t>
+              <a:t>4,308 × 36</a:t>
             </a:r>
           </a:p>
         </p:txBody>
@@ -8411,28 +8413,30 @@
           <p:cNvPr id="14" name="">
             <a:extLst xmlns:a="http://schemas.openxmlformats.org/drawingml/2006/main">
               <a:ext uri="{FF2B5EF4-FFF2-40B4-BE49-F238E27FC236}">
-                <a16:creationId xmlns:a16="http://schemas.microsoft.com/office/drawing/2014/main" id="{CE9D82DA-4D32-4AF2-BFCB-CC329E562116}"/>
-              </a:ext>
-            </a:extLst>
-          </p:cNvPr>
-          <p:cNvSpPr>
-            <a:spLocks xmlns:a="http://schemas.openxmlformats.org/drawingml/2006/main" noGrp="1"/>
-          </p:cNvSpPr>
-          <p:nvPr/>
-        </p:nvSpPr>
-        <p:spPr>
-          <a:xfrm xmlns:a="http://schemas.openxmlformats.org/drawingml/2006/main">
-            <a:off x="1000125" y="2990850"/>
-            <a:ext cx="476250" cy="476250"/>
-          </a:xfrm>
-          <a:prstGeom xmlns:a="http://schemas.openxmlformats.org/drawingml/2006/main" prst="ellipse">
+                <a16:creationId xmlns:a16="http://schemas.microsoft.com/office/drawing/2014/main" id="{2C151ECE-9B16-4F98-AFBE-3078E61244AB}"/>
+              </a:ext>
+            </a:extLst>
+          </p:cNvPr>
+          <p:cNvSpPr>
+            <a:spLocks xmlns:a="http://schemas.openxmlformats.org/drawingml/2006/main" noGrp="1"/>
+          </p:cNvSpPr>
+          <p:nvPr/>
+        </p:nvSpPr>
+        <p:spPr>
+          <a:xfrm xmlns:a="http://schemas.openxmlformats.org/drawingml/2006/main">
+            <a:off x="1714500" y="2771775"/>
+            <a:ext cx="9334500" cy="9525"/>
+          </a:xfrm>
+          <a:prstGeom xmlns:a="http://schemas.openxmlformats.org/drawingml/2006/main" prst="rect">
             <a:avLst/>
           </a:prstGeom>
           <a:solidFill xmlns:a="http://schemas.openxmlformats.org/drawingml/2006/main">
-            <a:srgbClr val="2C6E73"/>
+            <a:srgbClr val="D9E0E6"/>
           </a:solidFill>
           <a:ln xmlns:a="http://schemas.openxmlformats.org/drawingml/2006/main" w="0">
-            <a:noFill/>
+            <a:solidFill>
+              <a:srgbClr val="D9E0E6"/>
+            </a:solidFill>
           </a:ln>
         </p:spPr>
       </p:sp>
@@ -8441,19 +8445,19 @@
           <p:cNvPr id="15" name="">
             <a:extLst xmlns:a="http://schemas.openxmlformats.org/drawingml/2006/main">
               <a:ext uri="{FF2B5EF4-FFF2-40B4-BE49-F238E27FC236}">
-                <a16:creationId xmlns:a16="http://schemas.microsoft.com/office/drawing/2014/main" id="{A2D2E9CD-F0E7-4B66-9A93-664E386A6E22}"/>
-              </a:ext>
-            </a:extLst>
-          </p:cNvPr>
-          <p:cNvSpPr>
-            <a:spLocks xmlns:a="http://schemas.openxmlformats.org/drawingml/2006/main" noGrp="1"/>
-          </p:cNvSpPr>
-          <p:nvPr/>
-        </p:nvSpPr>
-        <p:spPr>
-          <a:xfrm xmlns:a="http://schemas.openxmlformats.org/drawingml/2006/main">
-            <a:off x="1000125" y="3019425"/>
-            <a:ext cx="476250" cy="419100"/>
+                <a16:creationId xmlns:a16="http://schemas.microsoft.com/office/drawing/2014/main" id="{B7808BD7-CE8D-423B-BA51-D21762527E38}"/>
+              </a:ext>
+            </a:extLst>
+          </p:cNvPr>
+          <p:cNvSpPr>
+            <a:spLocks xmlns:a="http://schemas.openxmlformats.org/drawingml/2006/main" noGrp="1"/>
+          </p:cNvSpPr>
+          <p:nvPr/>
+        </p:nvSpPr>
+        <p:spPr>
+          <a:xfrm xmlns:a="http://schemas.openxmlformats.org/drawingml/2006/main">
+            <a:off x="1162050" y="2905125"/>
+            <a:ext cx="400050" cy="400050"/>
           </a:xfrm>
           <a:prstGeom xmlns:a="http://schemas.openxmlformats.org/drawingml/2006/main" prst="rect">
             <a:avLst/>
@@ -8470,9 +8474,9 @@
           <a:lstStyle xmlns:a="http://schemas.openxmlformats.org/drawingml/2006/main"/>
           <a:p xmlns:a="http://schemas.openxmlformats.org/drawingml/2006/main">
             <a:pPr algn="ctr">
-              <a:defRPr sz="1350" b="1">
-                <a:solidFill>
-                  <a:srgbClr val="FFFFFF"/>
+              <a:defRPr sz="1125" b="1">
+                <a:solidFill>
+                  <a:srgbClr val="2C6E73"/>
                 </a:solidFill>
                 <a:latin typeface="Arial"/>
                 <a:ea typeface="Arial"/>
@@ -8480,9 +8484,9 @@
               </a:defRPr>
             </a:pPr>
             <a:r>
-              <a:rPr sz="1350" b="1">
-                <a:solidFill>
-                  <a:srgbClr val="FFFFFF"/>
+              <a:rPr sz="1125" b="1">
+                <a:solidFill>
+                  <a:srgbClr val="2C6E73"/>
                 </a:solidFill>
                 <a:latin typeface="Arial"/>
                 <a:ea typeface="Arial"/>
@@ -8498,19 +8502,19 @@
           <p:cNvPr id="16" name="">
             <a:extLst xmlns:a="http://schemas.openxmlformats.org/drawingml/2006/main">
               <a:ext uri="{FF2B5EF4-FFF2-40B4-BE49-F238E27FC236}">
-                <a16:creationId xmlns:a16="http://schemas.microsoft.com/office/drawing/2014/main" id="{F23CA0AA-9B5C-4F1C-923E-EF61E2CCB82B}"/>
-              </a:ext>
-            </a:extLst>
-          </p:cNvPr>
-          <p:cNvSpPr>
-            <a:spLocks xmlns:a="http://schemas.openxmlformats.org/drawingml/2006/main" noGrp="1"/>
-          </p:cNvSpPr>
-          <p:nvPr/>
-        </p:nvSpPr>
-        <p:spPr>
-          <a:xfrm xmlns:a="http://schemas.openxmlformats.org/drawingml/2006/main">
-            <a:off x="1714500" y="2924175"/>
-            <a:ext cx="9429750" cy="609600"/>
+                <a16:creationId xmlns:a16="http://schemas.microsoft.com/office/drawing/2014/main" id="{290D45CF-8C7F-4BD3-B0E2-3071F30F4C1B}"/>
+              </a:ext>
+            </a:extLst>
+          </p:cNvPr>
+          <p:cNvSpPr>
+            <a:spLocks xmlns:a="http://schemas.openxmlformats.org/drawingml/2006/main" noGrp="1"/>
+          </p:cNvSpPr>
+          <p:nvPr/>
+        </p:nvSpPr>
+        <p:spPr>
+          <a:xfrm xmlns:a="http://schemas.openxmlformats.org/drawingml/2006/main">
+            <a:off x="1714500" y="2819400"/>
+            <a:ext cx="9525000" cy="638175"/>
           </a:xfrm>
           <a:prstGeom xmlns:a="http://schemas.openxmlformats.org/drawingml/2006/main" prst="rect">
             <a:avLst/>
@@ -8527,7 +8531,7 @@
           <a:lstStyle xmlns:a="http://schemas.openxmlformats.org/drawingml/2006/main"/>
           <a:p xmlns:a="http://schemas.openxmlformats.org/drawingml/2006/main">
             <a:pPr algn="l">
-              <a:defRPr sz="1500" b="0">
+              <a:defRPr sz="1575" b="0">
                 <a:solidFill>
                   <a:srgbClr val="17253A"/>
                 </a:solidFill>
@@ -8537,7 +8541,7 @@
               </a:defRPr>
             </a:pPr>
             <a:r>
-              <a:rPr sz="1500" b="0">
+              <a:rPr sz="1575" b="0">
                 <a:solidFill>
                   <a:srgbClr val="17253A"/>
                 </a:solidFill>
@@ -8545,7 +8549,7 @@
                 <a:ea typeface="Arial"/>
                 <a:cs typeface="Arial"/>
               </a:rPr>
-              <a:t>Set up the method: Show a clear calculation or representation and explain the decision.</a:t>
+              <a:t>4,308 × 6 = 25,848</a:t>
             </a:r>
           </a:p>
         </p:txBody>
@@ -8555,28 +8559,30 @@
           <p:cNvPr id="17" name="">
             <a:extLst xmlns:a="http://schemas.openxmlformats.org/drawingml/2006/main">
               <a:ext uri="{FF2B5EF4-FFF2-40B4-BE49-F238E27FC236}">
-                <a16:creationId xmlns:a16="http://schemas.microsoft.com/office/drawing/2014/main" id="{63F40CDF-B12B-4888-90B0-9062A010809F}"/>
-              </a:ext>
-            </a:extLst>
-          </p:cNvPr>
-          <p:cNvSpPr>
-            <a:spLocks xmlns:a="http://schemas.openxmlformats.org/drawingml/2006/main" noGrp="1"/>
-          </p:cNvSpPr>
-          <p:nvPr/>
-        </p:nvSpPr>
-        <p:spPr>
-          <a:xfrm xmlns:a="http://schemas.openxmlformats.org/drawingml/2006/main">
-            <a:off x="1000125" y="3733800"/>
-            <a:ext cx="476250" cy="476250"/>
-          </a:xfrm>
-          <a:prstGeom xmlns:a="http://schemas.openxmlformats.org/drawingml/2006/main" prst="ellipse">
+                <a16:creationId xmlns:a16="http://schemas.microsoft.com/office/drawing/2014/main" id="{6E0FF55E-CD5D-4B1B-BDC6-8414AC0D7780}"/>
+              </a:ext>
+            </a:extLst>
+          </p:cNvPr>
+          <p:cNvSpPr>
+            <a:spLocks xmlns:a="http://schemas.openxmlformats.org/drawingml/2006/main" noGrp="1"/>
+          </p:cNvSpPr>
+          <p:nvPr/>
+        </p:nvSpPr>
+        <p:spPr>
+          <a:xfrm xmlns:a="http://schemas.openxmlformats.org/drawingml/2006/main">
+            <a:off x="1714500" y="3476625"/>
+            <a:ext cx="9334500" cy="9525"/>
+          </a:xfrm>
+          <a:prstGeom xmlns:a="http://schemas.openxmlformats.org/drawingml/2006/main" prst="rect">
             <a:avLst/>
           </a:prstGeom>
           <a:solidFill xmlns:a="http://schemas.openxmlformats.org/drawingml/2006/main">
-            <a:srgbClr val="2C6E73"/>
+            <a:srgbClr val="D9E0E6"/>
           </a:solidFill>
           <a:ln xmlns:a="http://schemas.openxmlformats.org/drawingml/2006/main" w="0">
-            <a:noFill/>
+            <a:solidFill>
+              <a:srgbClr val="D9E0E6"/>
+            </a:solidFill>
           </a:ln>
         </p:spPr>
       </p:sp>
@@ -8585,19 +8591,19 @@
           <p:cNvPr id="18" name="">
             <a:extLst xmlns:a="http://schemas.openxmlformats.org/drawingml/2006/main">
               <a:ext uri="{FF2B5EF4-FFF2-40B4-BE49-F238E27FC236}">
-                <a16:creationId xmlns:a16="http://schemas.microsoft.com/office/drawing/2014/main" id="{7A7ACDF2-1267-4B48-BEAD-76135193961E}"/>
-              </a:ext>
-            </a:extLst>
-          </p:cNvPr>
-          <p:cNvSpPr>
-            <a:spLocks xmlns:a="http://schemas.openxmlformats.org/drawingml/2006/main" noGrp="1"/>
-          </p:cNvSpPr>
-          <p:nvPr/>
-        </p:nvSpPr>
-        <p:spPr>
-          <a:xfrm xmlns:a="http://schemas.openxmlformats.org/drawingml/2006/main">
-            <a:off x="1000125" y="3762375"/>
-            <a:ext cx="476250" cy="419100"/>
+                <a16:creationId xmlns:a16="http://schemas.microsoft.com/office/drawing/2014/main" id="{CD21B730-3D24-497D-8828-E390441D5997}"/>
+              </a:ext>
+            </a:extLst>
+          </p:cNvPr>
+          <p:cNvSpPr>
+            <a:spLocks xmlns:a="http://schemas.openxmlformats.org/drawingml/2006/main" noGrp="1"/>
+          </p:cNvSpPr>
+          <p:nvPr/>
+        </p:nvSpPr>
+        <p:spPr>
+          <a:xfrm xmlns:a="http://schemas.openxmlformats.org/drawingml/2006/main">
+            <a:off x="1162050" y="3609975"/>
+            <a:ext cx="400050" cy="400050"/>
           </a:xfrm>
           <a:prstGeom xmlns:a="http://schemas.openxmlformats.org/drawingml/2006/main" prst="rect">
             <a:avLst/>
@@ -8614,9 +8620,9 @@
           <a:lstStyle xmlns:a="http://schemas.openxmlformats.org/drawingml/2006/main"/>
           <a:p xmlns:a="http://schemas.openxmlformats.org/drawingml/2006/main">
             <a:pPr algn="ctr">
-              <a:defRPr sz="1350" b="1">
-                <a:solidFill>
-                  <a:srgbClr val="FFFFFF"/>
+              <a:defRPr sz="1125" b="1">
+                <a:solidFill>
+                  <a:srgbClr val="2C6E73"/>
                 </a:solidFill>
                 <a:latin typeface="Arial"/>
                 <a:ea typeface="Arial"/>
@@ -8624,9 +8630,9 @@
               </a:defRPr>
             </a:pPr>
             <a:r>
-              <a:rPr sz="1350" b="1">
-                <a:solidFill>
-                  <a:srgbClr val="FFFFFF"/>
+              <a:rPr sz="1125" b="1">
+                <a:solidFill>
+                  <a:srgbClr val="2C6E73"/>
                 </a:solidFill>
                 <a:latin typeface="Arial"/>
                 <a:ea typeface="Arial"/>
@@ -8642,19 +8648,19 @@
           <p:cNvPr id="19" name="">
             <a:extLst xmlns:a="http://schemas.openxmlformats.org/drawingml/2006/main">
               <a:ext uri="{FF2B5EF4-FFF2-40B4-BE49-F238E27FC236}">
-                <a16:creationId xmlns:a16="http://schemas.microsoft.com/office/drawing/2014/main" id="{501027DA-4205-483D-A77D-21872F1ED3DE}"/>
-              </a:ext>
-            </a:extLst>
-          </p:cNvPr>
-          <p:cNvSpPr>
-            <a:spLocks xmlns:a="http://schemas.openxmlformats.org/drawingml/2006/main" noGrp="1"/>
-          </p:cNvSpPr>
-          <p:nvPr/>
-        </p:nvSpPr>
-        <p:spPr>
-          <a:xfrm xmlns:a="http://schemas.openxmlformats.org/drawingml/2006/main">
-            <a:off x="1714500" y="3667125"/>
-            <a:ext cx="9429750" cy="609600"/>
+                <a16:creationId xmlns:a16="http://schemas.microsoft.com/office/drawing/2014/main" id="{C07A8416-2D66-4CF5-831B-F21BDD659178}"/>
+              </a:ext>
+            </a:extLst>
+          </p:cNvPr>
+          <p:cNvSpPr>
+            <a:spLocks xmlns:a="http://schemas.openxmlformats.org/drawingml/2006/main" noGrp="1"/>
+          </p:cNvSpPr>
+          <p:nvPr/>
+        </p:nvSpPr>
+        <p:spPr>
+          <a:xfrm xmlns:a="http://schemas.openxmlformats.org/drawingml/2006/main">
+            <a:off x="1714500" y="3524250"/>
+            <a:ext cx="9525000" cy="638175"/>
           </a:xfrm>
           <a:prstGeom xmlns:a="http://schemas.openxmlformats.org/drawingml/2006/main" prst="rect">
             <a:avLst/>
@@ -8671,7 +8677,7 @@
           <a:lstStyle xmlns:a="http://schemas.openxmlformats.org/drawingml/2006/main"/>
           <a:p xmlns:a="http://schemas.openxmlformats.org/drawingml/2006/main">
             <a:pPr algn="l">
-              <a:defRPr sz="1500" b="0">
+              <a:defRPr sz="1575" b="0">
                 <a:solidFill>
                   <a:srgbClr val="17253A"/>
                 </a:solidFill>
@@ -8681,7 +8687,7 @@
               </a:defRPr>
             </a:pPr>
             <a:r>
-              <a:rPr sz="1500" b="0">
+              <a:rPr sz="1575" b="0">
                 <a:solidFill>
                   <a:srgbClr val="17253A"/>
                 </a:solidFill>
@@ -8689,7 +8695,7 @@
                 <a:ea typeface="Arial"/>
                 <a:cs typeface="Arial"/>
               </a:rPr>
-              <a:t>Complete the calculation: 155,088; estimate about 4,300 x 40 = 172,000.</a:t>
+              <a:t>4,308 × 30 = 129,240</a:t>
             </a:r>
           </a:p>
         </p:txBody>
@@ -8699,28 +8705,30 @@
           <p:cNvPr id="20" name="">
             <a:extLst xmlns:a="http://schemas.openxmlformats.org/drawingml/2006/main">
               <a:ext uri="{FF2B5EF4-FFF2-40B4-BE49-F238E27FC236}">
-                <a16:creationId xmlns:a16="http://schemas.microsoft.com/office/drawing/2014/main" id="{117C91EA-A0A2-45F9-8629-9C2FD36C9F8F}"/>
-              </a:ext>
-            </a:extLst>
-          </p:cNvPr>
-          <p:cNvSpPr>
-            <a:spLocks xmlns:a="http://schemas.openxmlformats.org/drawingml/2006/main" noGrp="1"/>
-          </p:cNvSpPr>
-          <p:nvPr/>
-        </p:nvSpPr>
-        <p:spPr>
-          <a:xfrm xmlns:a="http://schemas.openxmlformats.org/drawingml/2006/main">
-            <a:off x="1000125" y="4476750"/>
-            <a:ext cx="476250" cy="476250"/>
-          </a:xfrm>
-          <a:prstGeom xmlns:a="http://schemas.openxmlformats.org/drawingml/2006/main" prst="ellipse">
+                <a16:creationId xmlns:a16="http://schemas.microsoft.com/office/drawing/2014/main" id="{B12F24DA-0FCE-4F96-A53B-48220DD30A51}"/>
+              </a:ext>
+            </a:extLst>
+          </p:cNvPr>
+          <p:cNvSpPr>
+            <a:spLocks xmlns:a="http://schemas.openxmlformats.org/drawingml/2006/main" noGrp="1"/>
+          </p:cNvSpPr>
+          <p:nvPr/>
+        </p:nvSpPr>
+        <p:spPr>
+          <a:xfrm xmlns:a="http://schemas.openxmlformats.org/drawingml/2006/main">
+            <a:off x="1714500" y="4181475"/>
+            <a:ext cx="9334500" cy="9525"/>
+          </a:xfrm>
+          <a:prstGeom xmlns:a="http://schemas.openxmlformats.org/drawingml/2006/main" prst="rect">
             <a:avLst/>
           </a:prstGeom>
           <a:solidFill xmlns:a="http://schemas.openxmlformats.org/drawingml/2006/main">
-            <a:srgbClr val="2C6E73"/>
+            <a:srgbClr val="D9E0E6"/>
           </a:solidFill>
           <a:ln xmlns:a="http://schemas.openxmlformats.org/drawingml/2006/main" w="0">
-            <a:noFill/>
+            <a:solidFill>
+              <a:srgbClr val="D9E0E6"/>
+            </a:solidFill>
           </a:ln>
         </p:spPr>
       </p:sp>
@@ -8729,19 +8737,19 @@
           <p:cNvPr id="21" name="">
             <a:extLst xmlns:a="http://schemas.openxmlformats.org/drawingml/2006/main">
               <a:ext uri="{FF2B5EF4-FFF2-40B4-BE49-F238E27FC236}">
-                <a16:creationId xmlns:a16="http://schemas.microsoft.com/office/drawing/2014/main" id="{AF45075E-6F82-4F40-AE8B-3649322E2B85}"/>
-              </a:ext>
-            </a:extLst>
-          </p:cNvPr>
-          <p:cNvSpPr>
-            <a:spLocks xmlns:a="http://schemas.openxmlformats.org/drawingml/2006/main" noGrp="1"/>
-          </p:cNvSpPr>
-          <p:nvPr/>
-        </p:nvSpPr>
-        <p:spPr>
-          <a:xfrm xmlns:a="http://schemas.openxmlformats.org/drawingml/2006/main">
-            <a:off x="1000125" y="4505325"/>
-            <a:ext cx="476250" cy="419100"/>
+                <a16:creationId xmlns:a16="http://schemas.microsoft.com/office/drawing/2014/main" id="{76422B87-EC37-4367-9273-375BF554AD33}"/>
+              </a:ext>
+            </a:extLst>
+          </p:cNvPr>
+          <p:cNvSpPr>
+            <a:spLocks xmlns:a="http://schemas.openxmlformats.org/drawingml/2006/main" noGrp="1"/>
+          </p:cNvSpPr>
+          <p:nvPr/>
+        </p:nvSpPr>
+        <p:spPr>
+          <a:xfrm xmlns:a="http://schemas.openxmlformats.org/drawingml/2006/main">
+            <a:off x="1162050" y="4314825"/>
+            <a:ext cx="400050" cy="400050"/>
           </a:xfrm>
           <a:prstGeom xmlns:a="http://schemas.openxmlformats.org/drawingml/2006/main" prst="rect">
             <a:avLst/>
@@ -8758,9 +8766,9 @@
           <a:lstStyle xmlns:a="http://schemas.openxmlformats.org/drawingml/2006/main"/>
           <a:p xmlns:a="http://schemas.openxmlformats.org/drawingml/2006/main">
             <a:pPr algn="ctr">
-              <a:defRPr sz="1350" b="1">
-                <a:solidFill>
-                  <a:srgbClr val="FFFFFF"/>
+              <a:defRPr sz="1125" b="1">
+                <a:solidFill>
+                  <a:srgbClr val="2C6E73"/>
                 </a:solidFill>
                 <a:latin typeface="Arial"/>
                 <a:ea typeface="Arial"/>
@@ -8768,9 +8776,9 @@
               </a:defRPr>
             </a:pPr>
             <a:r>
-              <a:rPr sz="1350" b="1">
-                <a:solidFill>
-                  <a:srgbClr val="FFFFFF"/>
+              <a:rPr sz="1125" b="1">
+                <a:solidFill>
+                  <a:srgbClr val="2C6E73"/>
                 </a:solidFill>
                 <a:latin typeface="Arial"/>
                 <a:ea typeface="Arial"/>
@@ -8786,19 +8794,19 @@
           <p:cNvPr id="22" name="">
             <a:extLst xmlns:a="http://schemas.openxmlformats.org/drawingml/2006/main">
               <a:ext uri="{FF2B5EF4-FFF2-40B4-BE49-F238E27FC236}">
-                <a16:creationId xmlns:a16="http://schemas.microsoft.com/office/drawing/2014/main" id="{AFB829C4-4DCC-485B-AD7C-03655DFD75D7}"/>
-              </a:ext>
-            </a:extLst>
-          </p:cNvPr>
-          <p:cNvSpPr>
-            <a:spLocks xmlns:a="http://schemas.openxmlformats.org/drawingml/2006/main" noGrp="1"/>
-          </p:cNvSpPr>
-          <p:nvPr/>
-        </p:nvSpPr>
-        <p:spPr>
-          <a:xfrm xmlns:a="http://schemas.openxmlformats.org/drawingml/2006/main">
-            <a:off x="1714500" y="4410075"/>
-            <a:ext cx="9429750" cy="609600"/>
+                <a16:creationId xmlns:a16="http://schemas.microsoft.com/office/drawing/2014/main" id="{4F66ADDF-B3C8-42BE-A59A-46E5C844823F}"/>
+              </a:ext>
+            </a:extLst>
+          </p:cNvPr>
+          <p:cNvSpPr>
+            <a:spLocks xmlns:a="http://schemas.openxmlformats.org/drawingml/2006/main" noGrp="1"/>
+          </p:cNvSpPr>
+          <p:nvPr/>
+        </p:nvSpPr>
+        <p:spPr>
+          <a:xfrm xmlns:a="http://schemas.openxmlformats.org/drawingml/2006/main">
+            <a:off x="1714500" y="4229100"/>
+            <a:ext cx="9525000" cy="638175"/>
           </a:xfrm>
           <a:prstGeom xmlns:a="http://schemas.openxmlformats.org/drawingml/2006/main" prst="rect">
             <a:avLst/>
@@ -8815,9 +8823,9 @@
           <a:lstStyle xmlns:a="http://schemas.openxmlformats.org/drawingml/2006/main"/>
           <a:p xmlns:a="http://schemas.openxmlformats.org/drawingml/2006/main">
             <a:pPr algn="l">
-              <a:defRPr sz="1500" b="1">
-                <a:solidFill>
-                  <a:srgbClr val="2F785D"/>
+              <a:defRPr sz="1575" b="0">
+                <a:solidFill>
+                  <a:srgbClr val="17253A"/>
                 </a:solidFill>
                 <a:latin typeface="Arial"/>
                 <a:ea typeface="Arial"/>
@@ -8825,15 +8833,161 @@
               </a:defRPr>
             </a:pPr>
             <a:r>
-              <a:rPr sz="1500" b="1">
+              <a:rPr sz="1575" b="0">
+                <a:solidFill>
+                  <a:srgbClr val="17253A"/>
+                </a:solidFill>
+                <a:latin typeface="Arial"/>
+                <a:ea typeface="Arial"/>
+                <a:cs typeface="Arial"/>
+              </a:rPr>
+              <a:t>25,848 + 129,240 = 155,088</a:t>
+            </a:r>
+          </a:p>
+        </p:txBody>
+      </p:sp>
+      <p:sp>
+        <p:nvSpPr>
+          <p:cNvPr id="23" name="">
+            <a:extLst xmlns:a="http://schemas.openxmlformats.org/drawingml/2006/main">
+              <a:ext uri="{FF2B5EF4-FFF2-40B4-BE49-F238E27FC236}">
+                <a16:creationId xmlns:a16="http://schemas.microsoft.com/office/drawing/2014/main" id="{10298C90-4D9E-4403-A72B-5B9933117455}"/>
+              </a:ext>
+            </a:extLst>
+          </p:cNvPr>
+          <p:cNvSpPr>
+            <a:spLocks xmlns:a="http://schemas.openxmlformats.org/drawingml/2006/main" noGrp="1"/>
+          </p:cNvSpPr>
+          <p:nvPr/>
+        </p:nvSpPr>
+        <p:spPr>
+          <a:xfrm xmlns:a="http://schemas.openxmlformats.org/drawingml/2006/main">
+            <a:off x="1714500" y="4886325"/>
+            <a:ext cx="9334500" cy="9525"/>
+          </a:xfrm>
+          <a:prstGeom xmlns:a="http://schemas.openxmlformats.org/drawingml/2006/main" prst="rect">
+            <a:avLst/>
+          </a:prstGeom>
+          <a:solidFill xmlns:a="http://schemas.openxmlformats.org/drawingml/2006/main">
+            <a:srgbClr val="D9E0E6"/>
+          </a:solidFill>
+          <a:ln xmlns:a="http://schemas.openxmlformats.org/drawingml/2006/main" w="0">
+            <a:solidFill>
+              <a:srgbClr val="D9E0E6"/>
+            </a:solidFill>
+          </a:ln>
+        </p:spPr>
+      </p:sp>
+      <p:sp>
+        <p:nvSpPr>
+          <p:cNvPr id="24" name="">
+            <a:extLst xmlns:a="http://schemas.openxmlformats.org/drawingml/2006/main">
+              <a:ext uri="{FF2B5EF4-FFF2-40B4-BE49-F238E27FC236}">
+                <a16:creationId xmlns:a16="http://schemas.microsoft.com/office/drawing/2014/main" id="{99D76749-FBDD-44EB-B977-28C5EBF1E9BD}"/>
+              </a:ext>
+            </a:extLst>
+          </p:cNvPr>
+          <p:cNvSpPr>
+            <a:spLocks xmlns:a="http://schemas.openxmlformats.org/drawingml/2006/main" noGrp="1"/>
+          </p:cNvSpPr>
+          <p:nvPr/>
+        </p:nvSpPr>
+        <p:spPr>
+          <a:xfrm xmlns:a="http://schemas.openxmlformats.org/drawingml/2006/main">
+            <a:off x="1162050" y="5019675"/>
+            <a:ext cx="400050" cy="400050"/>
+          </a:xfrm>
+          <a:prstGeom xmlns:a="http://schemas.openxmlformats.org/drawingml/2006/main" prst="rect">
+            <a:avLst/>
+          </a:prstGeom>
+          <a:noFill xmlns:a="http://schemas.openxmlformats.org/drawingml/2006/main"/>
+          <a:ln xmlns:a="http://schemas.openxmlformats.org/drawingml/2006/main" w="0">
+            <a:noFill/>
+          </a:ln>
+        </p:spPr>
+        <p:txBody>
+          <a:bodyPr xmlns:a="http://schemas.openxmlformats.org/drawingml/2006/main" anchor="ctr">
+            <a:normAutofit fontScale="100000"/>
+          </a:bodyPr>
+          <a:lstStyle xmlns:a="http://schemas.openxmlformats.org/drawingml/2006/main"/>
+          <a:p xmlns:a="http://schemas.openxmlformats.org/drawingml/2006/main">
+            <a:pPr algn="ctr">
+              <a:defRPr sz="1125" b="1">
                 <a:solidFill>
                   <a:srgbClr val="2F785D"/>
                 </a:solidFill>
                 <a:latin typeface="Arial"/>
                 <a:ea typeface="Arial"/>
                 <a:cs typeface="Arial"/>
+              </a:defRPr>
+            </a:pPr>
+            <a:r>
+              <a:rPr sz="1125" b="1">
+                <a:solidFill>
+                  <a:srgbClr val="2F785D"/>
+                </a:solidFill>
+                <a:latin typeface="Arial"/>
+                <a:ea typeface="Arial"/>
+                <a:cs typeface="Arial"/>
               </a:rPr>
-              <a:t>Check the result: Check the result, identify any misconception and record the next step.</a:t>
+              <a:t>5</a:t>
+            </a:r>
+          </a:p>
+        </p:txBody>
+      </p:sp>
+      <p:sp>
+        <p:nvSpPr>
+          <p:cNvPr id="25" name="">
+            <a:extLst xmlns:a="http://schemas.openxmlformats.org/drawingml/2006/main">
+              <a:ext uri="{FF2B5EF4-FFF2-40B4-BE49-F238E27FC236}">
+                <a16:creationId xmlns:a16="http://schemas.microsoft.com/office/drawing/2014/main" id="{C46FCAA5-AE51-4422-BD8B-0E1146415E19}"/>
+              </a:ext>
+            </a:extLst>
+          </p:cNvPr>
+          <p:cNvSpPr>
+            <a:spLocks xmlns:a="http://schemas.openxmlformats.org/drawingml/2006/main" noGrp="1"/>
+          </p:cNvSpPr>
+          <p:nvPr/>
+        </p:nvSpPr>
+        <p:spPr>
+          <a:xfrm xmlns:a="http://schemas.openxmlformats.org/drawingml/2006/main">
+            <a:off x="1714500" y="4933950"/>
+            <a:ext cx="9525000" cy="638175"/>
+          </a:xfrm>
+          <a:prstGeom xmlns:a="http://schemas.openxmlformats.org/drawingml/2006/main" prst="rect">
+            <a:avLst/>
+          </a:prstGeom>
+          <a:noFill xmlns:a="http://schemas.openxmlformats.org/drawingml/2006/main"/>
+          <a:ln xmlns:a="http://schemas.openxmlformats.org/drawingml/2006/main" w="0">
+            <a:noFill/>
+          </a:ln>
+        </p:spPr>
+        <p:txBody>
+          <a:bodyPr xmlns:a="http://schemas.openxmlformats.org/drawingml/2006/main" anchor="ctr">
+            <a:normAutofit fontScale="100000"/>
+          </a:bodyPr>
+          <a:lstStyle xmlns:a="http://schemas.openxmlformats.org/drawingml/2006/main"/>
+          <a:p xmlns:a="http://schemas.openxmlformats.org/drawingml/2006/main">
+            <a:pPr algn="l">
+              <a:defRPr sz="1575" b="1">
+                <a:solidFill>
+                  <a:srgbClr val="2F785D"/>
+                </a:solidFill>
+                <a:latin typeface="Arial"/>
+                <a:ea typeface="Arial"/>
+                <a:cs typeface="Arial"/>
+              </a:defRPr>
+            </a:pPr>
+            <a:r>
+              <a:rPr sz="1575" b="1">
+                <a:solidFill>
+                  <a:srgbClr val="2F785D"/>
+                </a:solidFill>
+                <a:latin typeface="Arial"/>
+                <a:ea typeface="Arial"/>
+                <a:cs typeface="Arial"/>
+              </a:rPr>
+              <a:t>Estimate: 4,300 × 40 = 172,000</a:t>
             </a:r>
           </a:p>
         </p:txBody>
@@ -8841,7 +8995,7 @@
     </p:spTree>
     <p:extLst>
       <p:ext uri="{BB962C8B-B14F-4D97-AF65-F5344CB8AC3E}">
-        <p14:creationId xmlns:p14="http://schemas.microsoft.com/office/powerpoint/2010/main" val="334729342"/>
+        <p14:creationId xmlns:p14="http://schemas.microsoft.com/office/powerpoint/2010/main" val="1681390011"/>
       </p:ext>
     </p:extLst>
   </p:cSld>
@@ -9078,6 +9232,51 @@
                       </p:childTnLst>
                     </p:cTn>
                   </p:par>
+                  <p:par>
+                    <p:cTn id="23" fill="hold">
+                      <p:stCondLst>
+                        <p:cond delay="indefinite"/>
+                      </p:stCondLst>
+                      <p:childTnLst>
+                        <p:par>
+                          <p:cTn id="24" fill="hold">
+                            <p:stCondLst>
+                              <p:cond delay="0"/>
+                            </p:stCondLst>
+                            <p:childTnLst>
+                              <p:par>
+                                <p:cTn id="25" presetID="1" presetClass="entr" presetSubtype="0" fill="hold" grpId="0" nodeType="clickEffect">
+                                  <p:stCondLst>
+                                    <p:cond delay="0"/>
+                                  </p:stCondLst>
+                                  <p:childTnLst>
+                                    <p:set>
+                                      <p:cBhvr>
+                                        <p:cTn id="26" dur="1" fill="hold">
+                                          <p:stCondLst>
+                                            <p:cond delay="0"/>
+                                          </p:stCondLst>
+                                        </p:cTn>
+                                        <p:tgtEl>
+                                          <p:spTgt spid="25"/>
+                                        </p:tgtEl>
+                                        <p:attrNameLst>
+                                          <p:attrName>style.visibility</p:attrName>
+                                        </p:attrNameLst>
+                                      </p:cBhvr>
+                                      <p:to>
+                                        <p:strVal val="visible"/>
+                                      </p:to>
+                                    </p:set>
+                                  </p:childTnLst>
+                                </p:cTn>
+                              </p:par>
+                            </p:childTnLst>
+                          </p:cTn>
+                        </p:par>
+                      </p:childTnLst>
+                    </p:cTn>
+                  </p:par>
                 </p:childTnLst>
               </p:cTn>
               <p:prevCondLst>
@@ -9105,6 +9304,7 @@
       <p:bldP spid="16" grpId="0"/>
       <p:bldP spid="19" grpId="0"/>
       <p:bldP spid="22" grpId="0"/>
+      <p:bldP spid="25" grpId="0"/>
     </p:bldLst>
   </p:timing>
 </p:sld>
@@ -9134,7 +9334,7 @@
           <p:cNvPr id="15" name="">
             <a:extLst xmlns:a="http://schemas.openxmlformats.org/drawingml/2006/main">
               <a:ext uri="{FF2B5EF4-FFF2-40B4-BE49-F238E27FC236}">
-                <a16:creationId xmlns:a16="http://schemas.microsoft.com/office/drawing/2014/main" id="{BF66F8A4-3685-48ED-8CFA-22546D212401}"/>
+                <a16:creationId xmlns:a16="http://schemas.microsoft.com/office/drawing/2014/main" id="{B5FBD86B-A281-4484-8459-4C48900CC5DB}"/>
               </a:ext>
             </a:extLst>
           </p:cNvPr>
@@ -9166,7 +9366,7 @@
           <p:cNvPr id="2" name="">
             <a:extLst xmlns:a="http://schemas.openxmlformats.org/drawingml/2006/main">
               <a:ext uri="{FF2B5EF4-FFF2-40B4-BE49-F238E27FC236}">
-                <a16:creationId xmlns:a16="http://schemas.microsoft.com/office/drawing/2014/main" id="{609F1889-B920-48AF-8B4A-F4367CAE54BD}"/>
+                <a16:creationId xmlns:a16="http://schemas.microsoft.com/office/drawing/2014/main" id="{5296FDF3-8706-4499-8E81-AEE4D3ABC577}"/>
               </a:ext>
             </a:extLst>
           </p:cNvPr>
@@ -9223,7 +9423,7 @@
           <p:cNvPr id="3" name="">
             <a:extLst xmlns:a="http://schemas.openxmlformats.org/drawingml/2006/main">
               <a:ext uri="{FF2B5EF4-FFF2-40B4-BE49-F238E27FC236}">
-                <a16:creationId xmlns:a16="http://schemas.microsoft.com/office/drawing/2014/main" id="{DB1E01C1-9BEE-4224-A4DD-BE5FF94E262B}"/>
+                <a16:creationId xmlns:a16="http://schemas.microsoft.com/office/drawing/2014/main" id="{08377C03-769D-4D20-8E13-04D667283055}"/>
               </a:ext>
             </a:extLst>
           </p:cNvPr>
@@ -9255,7 +9455,7 @@
           <p:cNvPr id="4" name="">
             <a:extLst xmlns:a="http://schemas.openxmlformats.org/drawingml/2006/main">
               <a:ext uri="{FF2B5EF4-FFF2-40B4-BE49-F238E27FC236}">
-                <a16:creationId xmlns:a16="http://schemas.microsoft.com/office/drawing/2014/main" id="{38F3E760-6DAA-46EE-AFD6-F72AB7EA1F46}"/>
+                <a16:creationId xmlns:a16="http://schemas.microsoft.com/office/drawing/2014/main" id="{B6373079-A8DA-4F34-B1E8-42DC84F2EA8C}"/>
               </a:ext>
             </a:extLst>
           </p:cNvPr>
@@ -9312,7 +9512,7 @@
           <p:cNvPr id="5" name="">
             <a:extLst xmlns:a="http://schemas.openxmlformats.org/drawingml/2006/main">
               <a:ext uri="{FF2B5EF4-FFF2-40B4-BE49-F238E27FC236}">
-                <a16:creationId xmlns:a16="http://schemas.microsoft.com/office/drawing/2014/main" id="{DEA3CE32-C43D-4496-BBBB-93C371E6B1B1}"/>
+                <a16:creationId xmlns:a16="http://schemas.microsoft.com/office/drawing/2014/main" id="{281A9771-2958-418C-80A2-3F563B590D60}"/>
               </a:ext>
             </a:extLst>
           </p:cNvPr>
@@ -9369,7 +9569,7 @@
           <p:cNvPr id="6" name="">
             <a:extLst xmlns:a="http://schemas.openxmlformats.org/drawingml/2006/main">
               <a:ext uri="{FF2B5EF4-FFF2-40B4-BE49-F238E27FC236}">
-                <a16:creationId xmlns:a16="http://schemas.microsoft.com/office/drawing/2014/main" id="{167C6B68-23E4-477B-B681-4FC1ACF18356}"/>
+                <a16:creationId xmlns:a16="http://schemas.microsoft.com/office/drawing/2014/main" id="{122D61EC-9601-4131-8E5F-AD2487E8CAD0}"/>
               </a:ext>
             </a:extLst>
           </p:cNvPr>
@@ -9426,7 +9626,7 @@
           <p:cNvPr id="7" name="">
             <a:extLst xmlns:a="http://schemas.openxmlformats.org/drawingml/2006/main">
               <a:ext uri="{FF2B5EF4-FFF2-40B4-BE49-F238E27FC236}">
-                <a16:creationId xmlns:a16="http://schemas.microsoft.com/office/drawing/2014/main" id="{8F5732F4-D7F3-4F5F-8C3D-14989FCED16F}"/>
+                <a16:creationId xmlns:a16="http://schemas.microsoft.com/office/drawing/2014/main" id="{02F24866-A0D0-4142-BD9E-351EF685D7B1}"/>
               </a:ext>
             </a:extLst>
           </p:cNvPr>
@@ -9458,7 +9658,7 @@
           <p:cNvPr id="8" name="">
             <a:extLst xmlns:a="http://schemas.openxmlformats.org/drawingml/2006/main">
               <a:ext uri="{FF2B5EF4-FFF2-40B4-BE49-F238E27FC236}">
-                <a16:creationId xmlns:a16="http://schemas.microsoft.com/office/drawing/2014/main" id="{20CB298E-6753-45E7-902A-D52BD700FF40}"/>
+                <a16:creationId xmlns:a16="http://schemas.microsoft.com/office/drawing/2014/main" id="{1384B1C0-F191-44DC-A4BF-DF72F21B20A0}"/>
               </a:ext>
             </a:extLst>
           </p:cNvPr>
@@ -9515,7 +9715,7 @@
           <p:cNvPr id="9" name="">
             <a:extLst xmlns:a="http://schemas.openxmlformats.org/drawingml/2006/main">
               <a:ext uri="{FF2B5EF4-FFF2-40B4-BE49-F238E27FC236}">
-                <a16:creationId xmlns:a16="http://schemas.microsoft.com/office/drawing/2014/main" id="{2EDE3AA0-9248-4069-948E-DDB7C2999BAE}"/>
+                <a16:creationId xmlns:a16="http://schemas.microsoft.com/office/drawing/2014/main" id="{076C25CD-37F9-4EAD-BD36-4AB1F4483269}"/>
               </a:ext>
             </a:extLst>
           </p:cNvPr>
@@ -9572,7 +9772,7 @@
           <p:cNvPr id="10" name="">
             <a:extLst xmlns:a="http://schemas.openxmlformats.org/drawingml/2006/main">
               <a:ext uri="{FF2B5EF4-FFF2-40B4-BE49-F238E27FC236}">
-                <a16:creationId xmlns:a16="http://schemas.microsoft.com/office/drawing/2014/main" id="{056794EE-99D4-4EC0-B7D0-61F29E34B0E1}"/>
+                <a16:creationId xmlns:a16="http://schemas.microsoft.com/office/drawing/2014/main" id="{46CA6666-D9E0-4545-8447-72B989E9BDF5}"/>
               </a:ext>
             </a:extLst>
           </p:cNvPr>
@@ -9629,7 +9829,7 @@
           <p:cNvPr id="11" name="">
             <a:extLst xmlns:a="http://schemas.openxmlformats.org/drawingml/2006/main">
               <a:ext uri="{FF2B5EF4-FFF2-40B4-BE49-F238E27FC236}">
-                <a16:creationId xmlns:a16="http://schemas.microsoft.com/office/drawing/2014/main" id="{6B781DA5-5B3F-4F91-A783-03F45B551973}"/>
+                <a16:creationId xmlns:a16="http://schemas.microsoft.com/office/drawing/2014/main" id="{9CF0FCDB-959B-4910-8563-D7A01999B22F}"/>
               </a:ext>
             </a:extLst>
           </p:cNvPr>
@@ -9686,7 +9886,7 @@
           <p:cNvPr id="12" name="">
             <a:extLst xmlns:a="http://schemas.openxmlformats.org/drawingml/2006/main">
               <a:ext uri="{FF2B5EF4-FFF2-40B4-BE49-F238E27FC236}">
-                <a16:creationId xmlns:a16="http://schemas.microsoft.com/office/drawing/2014/main" id="{A4CCC74E-C439-4C7A-92C9-211CDBF7A4FC}"/>
+                <a16:creationId xmlns:a16="http://schemas.microsoft.com/office/drawing/2014/main" id="{E977337B-AB58-4AFD-A5A3-B3BF3EAA690B}"/>
               </a:ext>
             </a:extLst>
           </p:cNvPr>
@@ -9718,7 +9918,7 @@
           <p:cNvPr id="13" name="">
             <a:extLst xmlns:a="http://schemas.openxmlformats.org/drawingml/2006/main">
               <a:ext uri="{FF2B5EF4-FFF2-40B4-BE49-F238E27FC236}">
-                <a16:creationId xmlns:a16="http://schemas.microsoft.com/office/drawing/2014/main" id="{0560AF9E-AEBA-4854-9D9D-34E80431DDE7}"/>
+                <a16:creationId xmlns:a16="http://schemas.microsoft.com/office/drawing/2014/main" id="{0EC68035-907C-4172-AF35-7CDC133BDFEE}"/>
               </a:ext>
             </a:extLst>
           </p:cNvPr>
@@ -9775,7 +9975,7 @@
           <p:cNvPr id="14" name="">
             <a:extLst xmlns:a="http://schemas.openxmlformats.org/drawingml/2006/main">
               <a:ext uri="{FF2B5EF4-FFF2-40B4-BE49-F238E27FC236}">
-                <a16:creationId xmlns:a16="http://schemas.microsoft.com/office/drawing/2014/main" id="{5616D004-1BF8-47FA-85B0-4AF794DFDEEF}"/>
+                <a16:creationId xmlns:a16="http://schemas.microsoft.com/office/drawing/2014/main" id="{CB4081B1-10E4-4162-9BC3-619B5D879459}"/>
               </a:ext>
             </a:extLst>
           </p:cNvPr>
@@ -9830,7 +10030,7 @@
     </p:spTree>
     <p:extLst>
       <p:ext uri="{BB962C8B-B14F-4D97-AF65-F5344CB8AC3E}">
-        <p14:creationId xmlns:p14="http://schemas.microsoft.com/office/powerpoint/2010/main" val="192089176"/>
+        <p14:creationId xmlns:p14="http://schemas.microsoft.com/office/powerpoint/2010/main" val="1742500519"/>
       </p:ext>
     </p:extLst>
   </p:cSld>
@@ -10031,7 +10231,7 @@
           <p:cNvPr id="16" name="">
             <a:extLst xmlns:a="http://schemas.openxmlformats.org/drawingml/2006/main">
               <a:ext uri="{FF2B5EF4-FFF2-40B4-BE49-F238E27FC236}">
-                <a16:creationId xmlns:a16="http://schemas.microsoft.com/office/drawing/2014/main" id="{B63E4163-D197-4F9F-B74F-E0C66B9ED54B}"/>
+                <a16:creationId xmlns:a16="http://schemas.microsoft.com/office/drawing/2014/main" id="{3A709ABF-2958-47EA-9C35-F7A56EC680CC}"/>
               </a:ext>
             </a:extLst>
           </p:cNvPr>
@@ -10063,7 +10263,7 @@
           <p:cNvPr id="2" name="">
             <a:extLst xmlns:a="http://schemas.openxmlformats.org/drawingml/2006/main">
               <a:ext uri="{FF2B5EF4-FFF2-40B4-BE49-F238E27FC236}">
-                <a16:creationId xmlns:a16="http://schemas.microsoft.com/office/drawing/2014/main" id="{A4FCA0DB-5DEC-43CC-AE74-56AC8F6F4FAA}"/>
+                <a16:creationId xmlns:a16="http://schemas.microsoft.com/office/drawing/2014/main" id="{902633FC-E8FC-4F97-B96E-BBCD5B17F745}"/>
               </a:ext>
             </a:extLst>
           </p:cNvPr>
@@ -10120,7 +10320,7 @@
           <p:cNvPr id="3" name="">
             <a:extLst xmlns:a="http://schemas.openxmlformats.org/drawingml/2006/main">
               <a:ext uri="{FF2B5EF4-FFF2-40B4-BE49-F238E27FC236}">
-                <a16:creationId xmlns:a16="http://schemas.microsoft.com/office/drawing/2014/main" id="{96F5B753-903D-400C-9355-BE1D6B04EFF0}"/>
+                <a16:creationId xmlns:a16="http://schemas.microsoft.com/office/drawing/2014/main" id="{9F3B1180-4313-4509-8F65-4A34C0ABC6B9}"/>
               </a:ext>
             </a:extLst>
           </p:cNvPr>
@@ -10152,7 +10352,7 @@
           <p:cNvPr id="4" name="">
             <a:extLst xmlns:a="http://schemas.openxmlformats.org/drawingml/2006/main">
               <a:ext uri="{FF2B5EF4-FFF2-40B4-BE49-F238E27FC236}">
-                <a16:creationId xmlns:a16="http://schemas.microsoft.com/office/drawing/2014/main" id="{C9C0E4CB-841D-4EAE-BD4F-E30D463DA8DB}"/>
+                <a16:creationId xmlns:a16="http://schemas.microsoft.com/office/drawing/2014/main" id="{4E743A73-79D2-4E35-9CFE-1879F9FBA732}"/>
               </a:ext>
             </a:extLst>
           </p:cNvPr>
@@ -10209,7 +10409,7 @@
           <p:cNvPr id="5" name="">
             <a:extLst xmlns:a="http://schemas.openxmlformats.org/drawingml/2006/main">
               <a:ext uri="{FF2B5EF4-FFF2-40B4-BE49-F238E27FC236}">
-                <a16:creationId xmlns:a16="http://schemas.microsoft.com/office/drawing/2014/main" id="{619170AE-98CF-433E-A947-90915C7BBDA8}"/>
+                <a16:creationId xmlns:a16="http://schemas.microsoft.com/office/drawing/2014/main" id="{0D6F3C8B-E640-49A2-A5AB-688EA25A9776}"/>
               </a:ext>
             </a:extLst>
           </p:cNvPr>
@@ -10266,7 +10466,7 @@
           <p:cNvPr id="6" name="">
             <a:extLst xmlns:a="http://schemas.openxmlformats.org/drawingml/2006/main">
               <a:ext uri="{FF2B5EF4-FFF2-40B4-BE49-F238E27FC236}">
-                <a16:creationId xmlns:a16="http://schemas.microsoft.com/office/drawing/2014/main" id="{35E41A7B-D7FC-4EBB-BD5E-6820E71A3DD2}"/>
+                <a16:creationId xmlns:a16="http://schemas.microsoft.com/office/drawing/2014/main" id="{46D9CC4B-316F-4335-B803-1A2F7BB9A856}"/>
               </a:ext>
             </a:extLst>
           </p:cNvPr>
@@ -10323,7 +10523,7 @@
           <p:cNvPr id="7" name="">
             <a:extLst xmlns:a="http://schemas.openxmlformats.org/drawingml/2006/main">
               <a:ext uri="{FF2B5EF4-FFF2-40B4-BE49-F238E27FC236}">
-                <a16:creationId xmlns:a16="http://schemas.microsoft.com/office/drawing/2014/main" id="{F12271B3-5276-4396-AC4E-5CB13FD367E5}"/>
+                <a16:creationId xmlns:a16="http://schemas.microsoft.com/office/drawing/2014/main" id="{0DEEAA6E-1416-4E76-B140-58FBB723026D}"/>
               </a:ext>
             </a:extLst>
           </p:cNvPr>
@@ -10355,7 +10555,7 @@
           <p:cNvPr id="8" name="">
             <a:extLst xmlns:a="http://schemas.openxmlformats.org/drawingml/2006/main">
               <a:ext uri="{FF2B5EF4-FFF2-40B4-BE49-F238E27FC236}">
-                <a16:creationId xmlns:a16="http://schemas.microsoft.com/office/drawing/2014/main" id="{99D59C33-456B-490D-8F2A-F2B36049D8F9}"/>
+                <a16:creationId xmlns:a16="http://schemas.microsoft.com/office/drawing/2014/main" id="{0C6C981C-633E-45B6-B2AC-27051FA3F88C}"/>
               </a:ext>
             </a:extLst>
           </p:cNvPr>
@@ -10412,7 +10612,7 @@
           <p:cNvPr id="9" name="">
             <a:extLst xmlns:a="http://schemas.openxmlformats.org/drawingml/2006/main">
               <a:ext uri="{FF2B5EF4-FFF2-40B4-BE49-F238E27FC236}">
-                <a16:creationId xmlns:a16="http://schemas.microsoft.com/office/drawing/2014/main" id="{A51B9275-05B5-4EBA-93BE-EF80C8E6D854}"/>
+                <a16:creationId xmlns:a16="http://schemas.microsoft.com/office/drawing/2014/main" id="{AF575F2F-DE3D-4E5F-9D65-3B70A80A0FA1}"/>
               </a:ext>
             </a:extLst>
           </p:cNvPr>
@@ -10469,7 +10669,7 @@
           <p:cNvPr id="10" name="">
             <a:extLst xmlns:a="http://schemas.openxmlformats.org/drawingml/2006/main">
               <a:ext uri="{FF2B5EF4-FFF2-40B4-BE49-F238E27FC236}">
-                <a16:creationId xmlns:a16="http://schemas.microsoft.com/office/drawing/2014/main" id="{83404351-2B12-4BF6-8A02-54665479DC53}"/>
+                <a16:creationId xmlns:a16="http://schemas.microsoft.com/office/drawing/2014/main" id="{1174558A-784D-40D4-9DEE-3519518C65CE}"/>
               </a:ext>
             </a:extLst>
           </p:cNvPr>
@@ -10526,7 +10726,7 @@
           <p:cNvPr id="11" name="">
             <a:extLst xmlns:a="http://schemas.openxmlformats.org/drawingml/2006/main">
               <a:ext uri="{FF2B5EF4-FFF2-40B4-BE49-F238E27FC236}">
-                <a16:creationId xmlns:a16="http://schemas.microsoft.com/office/drawing/2014/main" id="{3B55C2C5-8342-48C9-B1DF-23C7CBCEA267}"/>
+                <a16:creationId xmlns:a16="http://schemas.microsoft.com/office/drawing/2014/main" id="{6D4E1DE7-E615-45A2-94D5-58E06191AB69}"/>
               </a:ext>
             </a:extLst>
           </p:cNvPr>
@@ -10583,7 +10783,7 @@
           <p:cNvPr id="12" name="">
             <a:extLst xmlns:a="http://schemas.openxmlformats.org/drawingml/2006/main">
               <a:ext uri="{FF2B5EF4-FFF2-40B4-BE49-F238E27FC236}">
-                <a16:creationId xmlns:a16="http://schemas.microsoft.com/office/drawing/2014/main" id="{6F3C2020-1425-4CB4-9192-C1096CC8AD19}"/>
+                <a16:creationId xmlns:a16="http://schemas.microsoft.com/office/drawing/2014/main" id="{06B6AA0F-F898-4D7A-BCD7-CDD18A8BA5F3}"/>
               </a:ext>
             </a:extLst>
           </p:cNvPr>
@@ -10640,7 +10840,7 @@
           <p:cNvPr id="13" name="">
             <a:extLst xmlns:a="http://schemas.openxmlformats.org/drawingml/2006/main">
               <a:ext uri="{FF2B5EF4-FFF2-40B4-BE49-F238E27FC236}">
-                <a16:creationId xmlns:a16="http://schemas.microsoft.com/office/drawing/2014/main" id="{B88DFBB6-B91B-477D-B016-9BC9EAF2D5F7}"/>
+                <a16:creationId xmlns:a16="http://schemas.microsoft.com/office/drawing/2014/main" id="{54E81AA3-751E-47AA-8520-BD80571A6CE8}"/>
               </a:ext>
             </a:extLst>
           </p:cNvPr>
@@ -10697,7 +10897,7 @@
           <p:cNvPr id="14" name="">
             <a:extLst xmlns:a="http://schemas.openxmlformats.org/drawingml/2006/main">
               <a:ext uri="{FF2B5EF4-FFF2-40B4-BE49-F238E27FC236}">
-                <a16:creationId xmlns:a16="http://schemas.microsoft.com/office/drawing/2014/main" id="{FB78C404-1C67-436D-9A7A-403D5470B9EC}"/>
+                <a16:creationId xmlns:a16="http://schemas.microsoft.com/office/drawing/2014/main" id="{E5DE06D9-0302-472E-9ACA-1BA1C2EC497B}"/>
               </a:ext>
             </a:extLst>
           </p:cNvPr>
@@ -10754,7 +10954,7 @@
           <p:cNvPr id="15" name="">
             <a:extLst xmlns:a="http://schemas.openxmlformats.org/drawingml/2006/main">
               <a:ext uri="{FF2B5EF4-FFF2-40B4-BE49-F238E27FC236}">
-                <a16:creationId xmlns:a16="http://schemas.microsoft.com/office/drawing/2014/main" id="{9C664222-7657-4274-A8DF-4656FBC6DC03}"/>
+                <a16:creationId xmlns:a16="http://schemas.microsoft.com/office/drawing/2014/main" id="{F7049822-395A-4657-A00B-2A46A344EB32}"/>
               </a:ext>
             </a:extLst>
           </p:cNvPr>
@@ -10809,7 +11009,7 @@
     </p:spTree>
     <p:extLst>
       <p:ext uri="{BB962C8B-B14F-4D97-AF65-F5344CB8AC3E}">
-        <p14:creationId xmlns:p14="http://schemas.microsoft.com/office/powerpoint/2010/main" val="48354356"/>
+        <p14:creationId xmlns:p14="http://schemas.microsoft.com/office/powerpoint/2010/main" val="592500545"/>
       </p:ext>
     </p:extLst>
   </p:cSld>
@@ -10964,7 +11164,7 @@
           <p:cNvPr id="16" name="">
             <a:extLst xmlns:a="http://schemas.openxmlformats.org/drawingml/2006/main">
               <a:ext uri="{FF2B5EF4-FFF2-40B4-BE49-F238E27FC236}">
-                <a16:creationId xmlns:a16="http://schemas.microsoft.com/office/drawing/2014/main" id="{184F574C-1A0D-4FE9-B575-C103E83D6B4A}"/>
+                <a16:creationId xmlns:a16="http://schemas.microsoft.com/office/drawing/2014/main" id="{2FD09B40-9C6F-4F13-B7AA-80617FB25D6C}"/>
               </a:ext>
             </a:extLst>
           </p:cNvPr>
@@ -10996,7 +11196,7 @@
           <p:cNvPr id="2" name="">
             <a:extLst xmlns:a="http://schemas.openxmlformats.org/drawingml/2006/main">
               <a:ext uri="{FF2B5EF4-FFF2-40B4-BE49-F238E27FC236}">
-                <a16:creationId xmlns:a16="http://schemas.microsoft.com/office/drawing/2014/main" id="{CCE37EF2-4705-4F80-AE23-22E3C3399437}"/>
+                <a16:creationId xmlns:a16="http://schemas.microsoft.com/office/drawing/2014/main" id="{ECBB44E3-F10F-4A5C-ACA4-B7400914C9CD}"/>
               </a:ext>
             </a:extLst>
           </p:cNvPr>
@@ -11053,7 +11253,7 @@
           <p:cNvPr id="3" name="">
             <a:extLst xmlns:a="http://schemas.openxmlformats.org/drawingml/2006/main">
               <a:ext uri="{FF2B5EF4-FFF2-40B4-BE49-F238E27FC236}">
-                <a16:creationId xmlns:a16="http://schemas.microsoft.com/office/drawing/2014/main" id="{B3C1D5DF-03EF-4507-A49A-6F55E0D1CC01}"/>
+                <a16:creationId xmlns:a16="http://schemas.microsoft.com/office/drawing/2014/main" id="{9B18D8A5-0FAD-4019-819A-ED29AAEFF676}"/>
               </a:ext>
             </a:extLst>
           </p:cNvPr>
@@ -11085,7 +11285,7 @@
           <p:cNvPr id="4" name="">
             <a:extLst xmlns:a="http://schemas.openxmlformats.org/drawingml/2006/main">
               <a:ext uri="{FF2B5EF4-FFF2-40B4-BE49-F238E27FC236}">
-                <a16:creationId xmlns:a16="http://schemas.microsoft.com/office/drawing/2014/main" id="{7AB2144A-3F1B-49D3-89D7-4FDC13DC135D}"/>
+                <a16:creationId xmlns:a16="http://schemas.microsoft.com/office/drawing/2014/main" id="{74C9F284-B80C-402C-8D6D-A38231522D90}"/>
               </a:ext>
             </a:extLst>
           </p:cNvPr>
@@ -11142,7 +11342,7 @@
           <p:cNvPr id="5" name="">
             <a:extLst xmlns:a="http://schemas.openxmlformats.org/drawingml/2006/main">
               <a:ext uri="{FF2B5EF4-FFF2-40B4-BE49-F238E27FC236}">
-                <a16:creationId xmlns:a16="http://schemas.microsoft.com/office/drawing/2014/main" id="{6F43C3D2-7577-42D9-9254-2BD50603B6D4}"/>
+                <a16:creationId xmlns:a16="http://schemas.microsoft.com/office/drawing/2014/main" id="{F39797F8-5653-4119-A264-74A4F022B43D}"/>
               </a:ext>
             </a:extLst>
           </p:cNvPr>
@@ -11199,7 +11399,7 @@
           <p:cNvPr id="6" name="">
             <a:extLst xmlns:a="http://schemas.openxmlformats.org/drawingml/2006/main">
               <a:ext uri="{FF2B5EF4-FFF2-40B4-BE49-F238E27FC236}">
-                <a16:creationId xmlns:a16="http://schemas.microsoft.com/office/drawing/2014/main" id="{6BC56EDE-EFD1-42EA-B943-133184EBB5BA}"/>
+                <a16:creationId xmlns:a16="http://schemas.microsoft.com/office/drawing/2014/main" id="{A33D9041-95C9-4787-BFA2-1531AFA34970}"/>
               </a:ext>
             </a:extLst>
           </p:cNvPr>
@@ -11256,7 +11456,7 @@
           <p:cNvPr id="7" name="">
             <a:extLst xmlns:a="http://schemas.openxmlformats.org/drawingml/2006/main">
               <a:ext uri="{FF2B5EF4-FFF2-40B4-BE49-F238E27FC236}">
-                <a16:creationId xmlns:a16="http://schemas.microsoft.com/office/drawing/2014/main" id="{3B948C2C-697D-433A-82BA-02FD9335C9BE}"/>
+                <a16:creationId xmlns:a16="http://schemas.microsoft.com/office/drawing/2014/main" id="{17E0DAF2-D3F2-4BC6-B0A8-6DFE5187D466}"/>
               </a:ext>
             </a:extLst>
           </p:cNvPr>
@@ -11288,7 +11488,7 @@
           <p:cNvPr id="8" name="">
             <a:extLst xmlns:a="http://schemas.openxmlformats.org/drawingml/2006/main">
               <a:ext uri="{FF2B5EF4-FFF2-40B4-BE49-F238E27FC236}">
-                <a16:creationId xmlns:a16="http://schemas.microsoft.com/office/drawing/2014/main" id="{7F839C24-07FC-4C1A-BA66-DF6A061431AB}"/>
+                <a16:creationId xmlns:a16="http://schemas.microsoft.com/office/drawing/2014/main" id="{A5558CCC-B539-47A1-BE90-8FE5CAF404AA}"/>
               </a:ext>
             </a:extLst>
           </p:cNvPr>
@@ -11345,7 +11545,7 @@
           <p:cNvPr id="9" name="">
             <a:extLst xmlns:a="http://schemas.openxmlformats.org/drawingml/2006/main">
               <a:ext uri="{FF2B5EF4-FFF2-40B4-BE49-F238E27FC236}">
-                <a16:creationId xmlns:a16="http://schemas.microsoft.com/office/drawing/2014/main" id="{71337BA1-997E-47BD-B562-FB173487366A}"/>
+                <a16:creationId xmlns:a16="http://schemas.microsoft.com/office/drawing/2014/main" id="{A1E120A3-B9AE-4470-8EC1-34F340DA762D}"/>
               </a:ext>
             </a:extLst>
           </p:cNvPr>
@@ -11406,7 +11606,7 @@
           <p:nvPr/>
         </p:nvPicPr>
         <p:blipFill>
-          <a:blip xmlns:r="http://schemas.openxmlformats.org/officeDocument/2006/relationships" xmlns:a="http://schemas.openxmlformats.org/drawingml/2006/main" r:embed="R4a190135e7374a36"/>
+          <a:blip xmlns:r="http://schemas.openxmlformats.org/officeDocument/2006/relationships" xmlns:a="http://schemas.openxmlformats.org/drawingml/2006/main" r:embed="R0f6934394311487c"/>
           <a:stretch xmlns:a="http://schemas.openxmlformats.org/drawingml/2006/main"/>
         </p:blipFill>
         <p:spPr>
@@ -11424,7 +11624,7 @@
           <p:cNvPr id="11" name="">
             <a:extLst xmlns:a="http://schemas.openxmlformats.org/drawingml/2006/main">
               <a:ext uri="{FF2B5EF4-FFF2-40B4-BE49-F238E27FC236}">
-                <a16:creationId xmlns:a16="http://schemas.microsoft.com/office/drawing/2014/main" id="{8F561441-DA5C-470E-B978-81468B0EFCFC}"/>
+                <a16:creationId xmlns:a16="http://schemas.microsoft.com/office/drawing/2014/main" id="{8AF54E02-C571-4486-838A-3BB715CBBF46}"/>
               </a:ext>
             </a:extLst>
           </p:cNvPr>
@@ -11481,7 +11681,7 @@
           <p:cNvPr id="12" name="">
             <a:extLst xmlns:a="http://schemas.openxmlformats.org/drawingml/2006/main">
               <a:ext uri="{FF2B5EF4-FFF2-40B4-BE49-F238E27FC236}">
-                <a16:creationId xmlns:a16="http://schemas.microsoft.com/office/drawing/2014/main" id="{20062CF5-1095-4956-802D-40AB32F14B7C}"/>
+                <a16:creationId xmlns:a16="http://schemas.microsoft.com/office/drawing/2014/main" id="{17F4A029-A706-4A31-B925-AD18D05C3781}"/>
               </a:ext>
             </a:extLst>
           </p:cNvPr>
@@ -11538,7 +11738,7 @@
           <p:cNvPr id="13" name="">
             <a:extLst xmlns:a="http://schemas.openxmlformats.org/drawingml/2006/main">
               <a:ext uri="{FF2B5EF4-FFF2-40B4-BE49-F238E27FC236}">
-                <a16:creationId xmlns:a16="http://schemas.microsoft.com/office/drawing/2014/main" id="{2FDD2B80-CAD8-4B9C-9A1F-07DB8DD27031}"/>
+                <a16:creationId xmlns:a16="http://schemas.microsoft.com/office/drawing/2014/main" id="{7BDC0ECE-7FDC-488F-A4BF-FFD307F4715E}"/>
               </a:ext>
             </a:extLst>
           </p:cNvPr>
@@ -11570,7 +11770,7 @@
           <p:cNvPr id="14" name="">
             <a:extLst xmlns:a="http://schemas.openxmlformats.org/drawingml/2006/main">
               <a:ext uri="{FF2B5EF4-FFF2-40B4-BE49-F238E27FC236}">
-                <a16:creationId xmlns:a16="http://schemas.microsoft.com/office/drawing/2014/main" id="{5410F915-77FF-4A29-962C-9177AA6F2481}"/>
+                <a16:creationId xmlns:a16="http://schemas.microsoft.com/office/drawing/2014/main" id="{82E463D3-6792-4299-909E-C35884902135}"/>
               </a:ext>
             </a:extLst>
           </p:cNvPr>
@@ -11627,7 +11827,7 @@
           <p:cNvPr id="15" name="">
             <a:extLst xmlns:a="http://schemas.openxmlformats.org/drawingml/2006/main">
               <a:ext uri="{FF2B5EF4-FFF2-40B4-BE49-F238E27FC236}">
-                <a16:creationId xmlns:a16="http://schemas.microsoft.com/office/drawing/2014/main" id="{B6F99821-276D-4CB3-9E23-90E8E9662AE4}"/>
+                <a16:creationId xmlns:a16="http://schemas.microsoft.com/office/drawing/2014/main" id="{116FC325-A95D-4934-8AC6-DFF6B5112F96}"/>
               </a:ext>
             </a:extLst>
           </p:cNvPr>
@@ -11682,7 +11882,7 @@
     </p:spTree>
     <p:extLst>
       <p:ext uri="{BB962C8B-B14F-4D97-AF65-F5344CB8AC3E}">
-        <p14:creationId xmlns:p14="http://schemas.microsoft.com/office/powerpoint/2010/main" val="861309813"/>
+        <p14:creationId xmlns:p14="http://schemas.microsoft.com/office/powerpoint/2010/main" val="1887508839"/>
       </p:ext>
     </p:extLst>
   </p:cSld>
@@ -11837,7 +12037,7 @@
           <p:cNvPr id="23" name="">
             <a:extLst xmlns:a="http://schemas.openxmlformats.org/drawingml/2006/main">
               <a:ext uri="{FF2B5EF4-FFF2-40B4-BE49-F238E27FC236}">
-                <a16:creationId xmlns:a16="http://schemas.microsoft.com/office/drawing/2014/main" id="{9273DDC4-781E-4DBD-80BB-8F5DA8A39A79}"/>
+                <a16:creationId xmlns:a16="http://schemas.microsoft.com/office/drawing/2014/main" id="{E660BC93-BCB4-451B-8317-D334DDE075A4}"/>
               </a:ext>
             </a:extLst>
           </p:cNvPr>
@@ -11869,7 +12069,7 @@
           <p:cNvPr id="2" name="">
             <a:extLst xmlns:a="http://schemas.openxmlformats.org/drawingml/2006/main">
               <a:ext uri="{FF2B5EF4-FFF2-40B4-BE49-F238E27FC236}">
-                <a16:creationId xmlns:a16="http://schemas.microsoft.com/office/drawing/2014/main" id="{EC993EA4-A351-4F70-9BEB-CCA00F17B3CD}"/>
+                <a16:creationId xmlns:a16="http://schemas.microsoft.com/office/drawing/2014/main" id="{1B54DBC3-48EE-4354-A614-C77C81495D79}"/>
               </a:ext>
             </a:extLst>
           </p:cNvPr>
@@ -11926,7 +12126,7 @@
           <p:cNvPr id="3" name="">
             <a:extLst xmlns:a="http://schemas.openxmlformats.org/drawingml/2006/main">
               <a:ext uri="{FF2B5EF4-FFF2-40B4-BE49-F238E27FC236}">
-                <a16:creationId xmlns:a16="http://schemas.microsoft.com/office/drawing/2014/main" id="{3844C4A5-6514-43D9-9A0F-4EB1B93269FF}"/>
+                <a16:creationId xmlns:a16="http://schemas.microsoft.com/office/drawing/2014/main" id="{83F2B937-E8A7-4DE2-BD14-D53E79636A32}"/>
               </a:ext>
             </a:extLst>
           </p:cNvPr>
@@ -11958,7 +12158,7 @@
           <p:cNvPr id="4" name="">
             <a:extLst xmlns:a="http://schemas.openxmlformats.org/drawingml/2006/main">
               <a:ext uri="{FF2B5EF4-FFF2-40B4-BE49-F238E27FC236}">
-                <a16:creationId xmlns:a16="http://schemas.microsoft.com/office/drawing/2014/main" id="{F60D664F-0442-4D11-A52E-1C39E65A769B}"/>
+                <a16:creationId xmlns:a16="http://schemas.microsoft.com/office/drawing/2014/main" id="{512290BF-2759-4954-B3B6-B14C13DF835F}"/>
               </a:ext>
             </a:extLst>
           </p:cNvPr>
@@ -12015,7 +12215,7 @@
           <p:cNvPr id="5" name="">
             <a:extLst xmlns:a="http://schemas.openxmlformats.org/drawingml/2006/main">
               <a:ext uri="{FF2B5EF4-FFF2-40B4-BE49-F238E27FC236}">
-                <a16:creationId xmlns:a16="http://schemas.microsoft.com/office/drawing/2014/main" id="{1D35E969-10ED-4A63-A6FD-A08EB77A958B}"/>
+                <a16:creationId xmlns:a16="http://schemas.microsoft.com/office/drawing/2014/main" id="{FFC99B17-4B6B-40DA-8DA4-C7F62CA33CC5}"/>
               </a:ext>
             </a:extLst>
           </p:cNvPr>
@@ -12072,7 +12272,7 @@
           <p:cNvPr id="6" name="">
             <a:extLst xmlns:a="http://schemas.openxmlformats.org/drawingml/2006/main">
               <a:ext uri="{FF2B5EF4-FFF2-40B4-BE49-F238E27FC236}">
-                <a16:creationId xmlns:a16="http://schemas.microsoft.com/office/drawing/2014/main" id="{B26295C1-6D0D-4564-9CE2-C5B50155369F}"/>
+                <a16:creationId xmlns:a16="http://schemas.microsoft.com/office/drawing/2014/main" id="{9FFE294F-4048-4D15-8A96-9EEA039E1580}"/>
               </a:ext>
             </a:extLst>
           </p:cNvPr>
@@ -12129,7 +12329,7 @@
           <p:cNvPr id="7" name="">
             <a:extLst xmlns:a="http://schemas.openxmlformats.org/drawingml/2006/main">
               <a:ext uri="{FF2B5EF4-FFF2-40B4-BE49-F238E27FC236}">
-                <a16:creationId xmlns:a16="http://schemas.microsoft.com/office/drawing/2014/main" id="{25021D36-3046-442C-87BD-D52AC06DD004}"/>
+                <a16:creationId xmlns:a16="http://schemas.microsoft.com/office/drawing/2014/main" id="{353C179E-1CAD-4C1B-87C4-A311B5774E3E}"/>
               </a:ext>
             </a:extLst>
           </p:cNvPr>
@@ -12161,7 +12361,7 @@
           <p:cNvPr id="8" name="">
             <a:extLst xmlns:a="http://schemas.openxmlformats.org/drawingml/2006/main">
               <a:ext uri="{FF2B5EF4-FFF2-40B4-BE49-F238E27FC236}">
-                <a16:creationId xmlns:a16="http://schemas.microsoft.com/office/drawing/2014/main" id="{254BEF11-5359-43E8-B0DC-CA2FC3037F51}"/>
+                <a16:creationId xmlns:a16="http://schemas.microsoft.com/office/drawing/2014/main" id="{8B35E870-A0C1-4C02-9295-9DE01A5EBDF0}"/>
               </a:ext>
             </a:extLst>
           </p:cNvPr>
@@ -12218,7 +12418,7 @@
           <p:cNvPr id="9" name="">
             <a:extLst xmlns:a="http://schemas.openxmlformats.org/drawingml/2006/main">
               <a:ext uri="{FF2B5EF4-FFF2-40B4-BE49-F238E27FC236}">
-                <a16:creationId xmlns:a16="http://schemas.microsoft.com/office/drawing/2014/main" id="{589591E8-4EF9-4442-97D6-B27E99CC83E8}"/>
+                <a16:creationId xmlns:a16="http://schemas.microsoft.com/office/drawing/2014/main" id="{06F7B0C0-CD8C-40D5-A940-A8992B556C12}"/>
               </a:ext>
             </a:extLst>
           </p:cNvPr>
@@ -12275,7 +12475,7 @@
           <p:cNvPr id="10" name="">
             <a:extLst xmlns:a="http://schemas.openxmlformats.org/drawingml/2006/main">
               <a:ext uri="{FF2B5EF4-FFF2-40B4-BE49-F238E27FC236}">
-                <a16:creationId xmlns:a16="http://schemas.microsoft.com/office/drawing/2014/main" id="{8D3E9A60-D491-4AA2-B037-AB79FCD850C3}"/>
+                <a16:creationId xmlns:a16="http://schemas.microsoft.com/office/drawing/2014/main" id="{928E352F-C1B0-4F87-AC9D-90466190142E}"/>
               </a:ext>
             </a:extLst>
           </p:cNvPr>
@@ -12309,7 +12509,7 @@
           <p:cNvPr id="11" name="">
             <a:extLst xmlns:a="http://schemas.openxmlformats.org/drawingml/2006/main">
               <a:ext uri="{FF2B5EF4-FFF2-40B4-BE49-F238E27FC236}">
-                <a16:creationId xmlns:a16="http://schemas.microsoft.com/office/drawing/2014/main" id="{B9C28469-C131-4600-A027-F22D9CA4EAAA}"/>
+                <a16:creationId xmlns:a16="http://schemas.microsoft.com/office/drawing/2014/main" id="{E897C86F-F864-4A2F-B8D5-8BF332F0D364}"/>
               </a:ext>
             </a:extLst>
           </p:cNvPr>
@@ -12341,7 +12541,7 @@
           <p:cNvPr id="12" name="">
             <a:extLst xmlns:a="http://schemas.openxmlformats.org/drawingml/2006/main">
               <a:ext uri="{FF2B5EF4-FFF2-40B4-BE49-F238E27FC236}">
-                <a16:creationId xmlns:a16="http://schemas.microsoft.com/office/drawing/2014/main" id="{225D585C-028B-495F-8445-93A41DA61A4D}"/>
+                <a16:creationId xmlns:a16="http://schemas.microsoft.com/office/drawing/2014/main" id="{2A51B274-C869-4A9D-AC31-9DC9F75B0FBD}"/>
               </a:ext>
             </a:extLst>
           </p:cNvPr>
@@ -12398,7 +12598,7 @@
           <p:cNvPr id="13" name="">
             <a:extLst xmlns:a="http://schemas.openxmlformats.org/drawingml/2006/main">
               <a:ext uri="{FF2B5EF4-FFF2-40B4-BE49-F238E27FC236}">
-                <a16:creationId xmlns:a16="http://schemas.microsoft.com/office/drawing/2014/main" id="{5505BCA9-2775-4F13-BA58-8FC13F8818D1}"/>
+                <a16:creationId xmlns:a16="http://schemas.microsoft.com/office/drawing/2014/main" id="{2F1FFA0A-45F2-4E26-BA99-2D1396D9391B}"/>
               </a:ext>
             </a:extLst>
           </p:cNvPr>
@@ -12455,7 +12655,7 @@
           <p:cNvPr id="14" name="">
             <a:extLst xmlns:a="http://schemas.openxmlformats.org/drawingml/2006/main">
               <a:ext uri="{FF2B5EF4-FFF2-40B4-BE49-F238E27FC236}">
-                <a16:creationId xmlns:a16="http://schemas.microsoft.com/office/drawing/2014/main" id="{0413ACE1-6CC6-4A3E-993E-0942A625CABB}"/>
+                <a16:creationId xmlns:a16="http://schemas.microsoft.com/office/drawing/2014/main" id="{8C32AD69-E335-41AB-B127-9E77E2935EF1}"/>
               </a:ext>
             </a:extLst>
           </p:cNvPr>
@@ -12489,7 +12689,7 @@
           <p:cNvPr id="15" name="">
             <a:extLst xmlns:a="http://schemas.openxmlformats.org/drawingml/2006/main">
               <a:ext uri="{FF2B5EF4-FFF2-40B4-BE49-F238E27FC236}">
-                <a16:creationId xmlns:a16="http://schemas.microsoft.com/office/drawing/2014/main" id="{3B843F0A-5420-49CC-A138-17887991235C}"/>
+                <a16:creationId xmlns:a16="http://schemas.microsoft.com/office/drawing/2014/main" id="{84CB34E1-51F8-426C-8E62-1DACE69DFF31}"/>
               </a:ext>
             </a:extLst>
           </p:cNvPr>
@@ -12521,7 +12721,7 @@
           <p:cNvPr id="16" name="">
             <a:extLst xmlns:a="http://schemas.openxmlformats.org/drawingml/2006/main">
               <a:ext uri="{FF2B5EF4-FFF2-40B4-BE49-F238E27FC236}">
-                <a16:creationId xmlns:a16="http://schemas.microsoft.com/office/drawing/2014/main" id="{15F8F2A6-FF11-4D11-A5E9-11ABCC1351B2}"/>
+                <a16:creationId xmlns:a16="http://schemas.microsoft.com/office/drawing/2014/main" id="{0E25C666-70B3-421E-923C-58A63BA40046}"/>
               </a:ext>
             </a:extLst>
           </p:cNvPr>
@@ -12578,7 +12778,7 @@
           <p:cNvPr id="17" name="">
             <a:extLst xmlns:a="http://schemas.openxmlformats.org/drawingml/2006/main">
               <a:ext uri="{FF2B5EF4-FFF2-40B4-BE49-F238E27FC236}">
-                <a16:creationId xmlns:a16="http://schemas.microsoft.com/office/drawing/2014/main" id="{0AF8D6E5-7B01-422B-AE3A-04FA9E18740D}"/>
+                <a16:creationId xmlns:a16="http://schemas.microsoft.com/office/drawing/2014/main" id="{3BAE5480-A9B9-4ADF-8030-87596EBF77F2}"/>
               </a:ext>
             </a:extLst>
           </p:cNvPr>
@@ -12635,7 +12835,7 @@
           <p:cNvPr id="18" name="">
             <a:extLst xmlns:a="http://schemas.openxmlformats.org/drawingml/2006/main">
               <a:ext uri="{FF2B5EF4-FFF2-40B4-BE49-F238E27FC236}">
-                <a16:creationId xmlns:a16="http://schemas.microsoft.com/office/drawing/2014/main" id="{58C0861D-BAE0-48B2-8687-13B443FC786E}"/>
+                <a16:creationId xmlns:a16="http://schemas.microsoft.com/office/drawing/2014/main" id="{CC9E89A9-FCD9-4044-A5C6-15ED5DD3BB53}"/>
               </a:ext>
             </a:extLst>
           </p:cNvPr>
@@ -12669,7 +12869,7 @@
           <p:cNvPr id="19" name="">
             <a:extLst xmlns:a="http://schemas.openxmlformats.org/drawingml/2006/main">
               <a:ext uri="{FF2B5EF4-FFF2-40B4-BE49-F238E27FC236}">
-                <a16:creationId xmlns:a16="http://schemas.microsoft.com/office/drawing/2014/main" id="{2DCE63D2-239D-491D-8261-48ADD15ECE14}"/>
+                <a16:creationId xmlns:a16="http://schemas.microsoft.com/office/drawing/2014/main" id="{C3AB6013-01AF-4B22-8C86-C2A01E24BF06}"/>
               </a:ext>
             </a:extLst>
           </p:cNvPr>
@@ -12701,7 +12901,7 @@
           <p:cNvPr id="20" name="">
             <a:extLst xmlns:a="http://schemas.openxmlformats.org/drawingml/2006/main">
               <a:ext uri="{FF2B5EF4-FFF2-40B4-BE49-F238E27FC236}">
-                <a16:creationId xmlns:a16="http://schemas.microsoft.com/office/drawing/2014/main" id="{802224AB-53DE-4117-8228-C31E00A29FA0}"/>
+                <a16:creationId xmlns:a16="http://schemas.microsoft.com/office/drawing/2014/main" id="{100D1DF8-2072-4D67-8121-D81654C13CA2}"/>
               </a:ext>
             </a:extLst>
           </p:cNvPr>
@@ -12758,7 +12958,7 @@
           <p:cNvPr id="21" name="">
             <a:extLst xmlns:a="http://schemas.openxmlformats.org/drawingml/2006/main">
               <a:ext uri="{FF2B5EF4-FFF2-40B4-BE49-F238E27FC236}">
-                <a16:creationId xmlns:a16="http://schemas.microsoft.com/office/drawing/2014/main" id="{109A5617-C6BF-44CA-A8DC-A0F6845273ED}"/>
+                <a16:creationId xmlns:a16="http://schemas.microsoft.com/office/drawing/2014/main" id="{8AE2CC11-E37A-4E86-B98C-E41580F7ABC8}"/>
               </a:ext>
             </a:extLst>
           </p:cNvPr>
@@ -12815,7 +13015,7 @@
           <p:cNvPr id="22" name="">
             <a:extLst xmlns:a="http://schemas.openxmlformats.org/drawingml/2006/main">
               <a:ext uri="{FF2B5EF4-FFF2-40B4-BE49-F238E27FC236}">
-                <a16:creationId xmlns:a16="http://schemas.microsoft.com/office/drawing/2014/main" id="{CDD018EA-D780-4240-A3C8-85DDC2FBA9A8}"/>
+                <a16:creationId xmlns:a16="http://schemas.microsoft.com/office/drawing/2014/main" id="{63939346-84EC-4027-9CB8-F9F4AD5CE57B}"/>
               </a:ext>
             </a:extLst>
           </p:cNvPr>
@@ -12870,7 +13070,7 @@
     </p:spTree>
     <p:extLst>
       <p:ext uri="{BB962C8B-B14F-4D97-AF65-F5344CB8AC3E}">
-        <p14:creationId xmlns:p14="http://schemas.microsoft.com/office/powerpoint/2010/main" val="1245405430"/>
+        <p14:creationId xmlns:p14="http://schemas.microsoft.com/office/powerpoint/2010/main" val="657617129"/>
       </p:ext>
     </p:extLst>
   </p:cSld>
@@ -13071,7 +13271,7 @@
           <p:cNvPr id="22" name="">
             <a:extLst xmlns:a="http://schemas.openxmlformats.org/drawingml/2006/main">
               <a:ext uri="{FF2B5EF4-FFF2-40B4-BE49-F238E27FC236}">
-                <a16:creationId xmlns:a16="http://schemas.microsoft.com/office/drawing/2014/main" id="{AA060B91-0F85-4496-99B2-6FEFB851DF46}"/>
+                <a16:creationId xmlns:a16="http://schemas.microsoft.com/office/drawing/2014/main" id="{8069E111-CC5C-4145-81AD-6B8FD8809973}"/>
               </a:ext>
             </a:extLst>
           </p:cNvPr>
@@ -13103,7 +13303,7 @@
           <p:cNvPr id="2" name="">
             <a:extLst xmlns:a="http://schemas.openxmlformats.org/drawingml/2006/main">
               <a:ext uri="{FF2B5EF4-FFF2-40B4-BE49-F238E27FC236}">
-                <a16:creationId xmlns:a16="http://schemas.microsoft.com/office/drawing/2014/main" id="{FE222766-0BC4-4396-9F81-49A07BDC9072}"/>
+                <a16:creationId xmlns:a16="http://schemas.microsoft.com/office/drawing/2014/main" id="{940B1CCF-A437-44E3-A579-FBA33787B716}"/>
               </a:ext>
             </a:extLst>
           </p:cNvPr>
@@ -13160,7 +13360,7 @@
           <p:cNvPr id="3" name="">
             <a:extLst xmlns:a="http://schemas.openxmlformats.org/drawingml/2006/main">
               <a:ext uri="{FF2B5EF4-FFF2-40B4-BE49-F238E27FC236}">
-                <a16:creationId xmlns:a16="http://schemas.microsoft.com/office/drawing/2014/main" id="{DFFE960F-8FA3-4718-933A-42E383FD97C5}"/>
+                <a16:creationId xmlns:a16="http://schemas.microsoft.com/office/drawing/2014/main" id="{98A3DB5A-6EAE-434A-9997-F8187E42ED4E}"/>
               </a:ext>
             </a:extLst>
           </p:cNvPr>
@@ -13192,7 +13392,7 @@
           <p:cNvPr id="4" name="">
             <a:extLst xmlns:a="http://schemas.openxmlformats.org/drawingml/2006/main">
               <a:ext uri="{FF2B5EF4-FFF2-40B4-BE49-F238E27FC236}">
-                <a16:creationId xmlns:a16="http://schemas.microsoft.com/office/drawing/2014/main" id="{B92BDC63-B534-446F-9300-65C7B41541B0}"/>
+                <a16:creationId xmlns:a16="http://schemas.microsoft.com/office/drawing/2014/main" id="{632A2878-B589-45F0-8AC1-EDA7D0D3C66D}"/>
               </a:ext>
             </a:extLst>
           </p:cNvPr>
@@ -13249,7 +13449,7 @@
           <p:cNvPr id="5" name="">
             <a:extLst xmlns:a="http://schemas.openxmlformats.org/drawingml/2006/main">
               <a:ext uri="{FF2B5EF4-FFF2-40B4-BE49-F238E27FC236}">
-                <a16:creationId xmlns:a16="http://schemas.microsoft.com/office/drawing/2014/main" id="{7B7603DD-9A66-4A60-96DC-6AA425CB64CE}"/>
+                <a16:creationId xmlns:a16="http://schemas.microsoft.com/office/drawing/2014/main" id="{B4054AEF-6E61-424D-A666-358C3659BC71}"/>
               </a:ext>
             </a:extLst>
           </p:cNvPr>
@@ -13306,7 +13506,7 @@
           <p:cNvPr id="6" name="">
             <a:extLst xmlns:a="http://schemas.openxmlformats.org/drawingml/2006/main">
               <a:ext uri="{FF2B5EF4-FFF2-40B4-BE49-F238E27FC236}">
-                <a16:creationId xmlns:a16="http://schemas.microsoft.com/office/drawing/2014/main" id="{96E05D61-94B9-4850-B63C-DC5788D64FF1}"/>
+                <a16:creationId xmlns:a16="http://schemas.microsoft.com/office/drawing/2014/main" id="{B585A99A-CC67-46EA-B2D2-39A814ED42E4}"/>
               </a:ext>
             </a:extLst>
           </p:cNvPr>
@@ -13363,7 +13563,7 @@
           <p:cNvPr id="7" name="">
             <a:extLst xmlns:a="http://schemas.openxmlformats.org/drawingml/2006/main">
               <a:ext uri="{FF2B5EF4-FFF2-40B4-BE49-F238E27FC236}">
-                <a16:creationId xmlns:a16="http://schemas.microsoft.com/office/drawing/2014/main" id="{6319DE61-18E4-43D8-9333-BCAF718FB4B8}"/>
+                <a16:creationId xmlns:a16="http://schemas.microsoft.com/office/drawing/2014/main" id="{EE44DA66-D0D3-46E8-A08E-D989D213AB76}"/>
               </a:ext>
             </a:extLst>
           </p:cNvPr>
@@ -13395,7 +13595,7 @@
           <p:cNvPr id="8" name="">
             <a:extLst xmlns:a="http://schemas.openxmlformats.org/drawingml/2006/main">
               <a:ext uri="{FF2B5EF4-FFF2-40B4-BE49-F238E27FC236}">
-                <a16:creationId xmlns:a16="http://schemas.microsoft.com/office/drawing/2014/main" id="{F8E7E9CA-F68A-4938-AA0F-10EE560A0AAF}"/>
+                <a16:creationId xmlns:a16="http://schemas.microsoft.com/office/drawing/2014/main" id="{A49DE219-CBD4-4B16-BCBE-3B0ED775CB1D}"/>
               </a:ext>
             </a:extLst>
           </p:cNvPr>
@@ -13452,7 +13652,7 @@
           <p:cNvPr id="9" name="">
             <a:extLst xmlns:a="http://schemas.openxmlformats.org/drawingml/2006/main">
               <a:ext uri="{FF2B5EF4-FFF2-40B4-BE49-F238E27FC236}">
-                <a16:creationId xmlns:a16="http://schemas.microsoft.com/office/drawing/2014/main" id="{097AA7EC-6F5E-4952-9053-4E2238B22EF0}"/>
+                <a16:creationId xmlns:a16="http://schemas.microsoft.com/office/drawing/2014/main" id="{43A4EB3B-AF67-433E-9735-3B5FA7E2DAAF}"/>
               </a:ext>
             </a:extLst>
           </p:cNvPr>
@@ -13509,7 +13709,7 @@
           <p:cNvPr id="10" name="">
             <a:extLst xmlns:a="http://schemas.openxmlformats.org/drawingml/2006/main">
               <a:ext uri="{FF2B5EF4-FFF2-40B4-BE49-F238E27FC236}">
-                <a16:creationId xmlns:a16="http://schemas.microsoft.com/office/drawing/2014/main" id="{95090B1D-1393-425C-8355-C542213C57DA}"/>
+                <a16:creationId xmlns:a16="http://schemas.microsoft.com/office/drawing/2014/main" id="{63C0D409-3CE3-4650-8866-D9EE340DD914}"/>
               </a:ext>
             </a:extLst>
           </p:cNvPr>
@@ -13543,7 +13743,7 @@
           <p:cNvPr id="11" name="">
             <a:extLst xmlns:a="http://schemas.openxmlformats.org/drawingml/2006/main">
               <a:ext uri="{FF2B5EF4-FFF2-40B4-BE49-F238E27FC236}">
-                <a16:creationId xmlns:a16="http://schemas.microsoft.com/office/drawing/2014/main" id="{FE483642-6B3B-425F-A3BC-9CA9EC04E0E4}"/>
+                <a16:creationId xmlns:a16="http://schemas.microsoft.com/office/drawing/2014/main" id="{26EFACB9-9AF0-4B70-8395-0344DF1CEB62}"/>
               </a:ext>
             </a:extLst>
           </p:cNvPr>
@@ -13575,7 +13775,7 @@
           <p:cNvPr id="12" name="">
             <a:extLst xmlns:a="http://schemas.openxmlformats.org/drawingml/2006/main">
               <a:ext uri="{FF2B5EF4-FFF2-40B4-BE49-F238E27FC236}">
-                <a16:creationId xmlns:a16="http://schemas.microsoft.com/office/drawing/2014/main" id="{E9BBE00C-B663-4801-B5A0-54290BF14655}"/>
+                <a16:creationId xmlns:a16="http://schemas.microsoft.com/office/drawing/2014/main" id="{B8F4DBA8-D190-4CDD-9AD0-C8E4E02E1FDF}"/>
               </a:ext>
             </a:extLst>
           </p:cNvPr>
@@ -13632,7 +13832,7 @@
           <p:cNvPr id="13" name="">
             <a:extLst xmlns:a="http://schemas.openxmlformats.org/drawingml/2006/main">
               <a:ext uri="{FF2B5EF4-FFF2-40B4-BE49-F238E27FC236}">
-                <a16:creationId xmlns:a16="http://schemas.microsoft.com/office/drawing/2014/main" id="{003365CB-B8CE-4B88-9C97-56C8857D5A1B}"/>
+                <a16:creationId xmlns:a16="http://schemas.microsoft.com/office/drawing/2014/main" id="{FE52C89D-2DBC-45D1-AA10-FD96177FA5F6}"/>
               </a:ext>
             </a:extLst>
           </p:cNvPr>
@@ -13689,7 +13889,7 @@
           <p:cNvPr id="14" name="">
             <a:extLst xmlns:a="http://schemas.openxmlformats.org/drawingml/2006/main">
               <a:ext uri="{FF2B5EF4-FFF2-40B4-BE49-F238E27FC236}">
-                <a16:creationId xmlns:a16="http://schemas.microsoft.com/office/drawing/2014/main" id="{154C35F5-9378-4487-B27C-7355E9FAD31D}"/>
+                <a16:creationId xmlns:a16="http://schemas.microsoft.com/office/drawing/2014/main" id="{2B7FF153-3C03-4A50-817F-2CE32AC91EDC}"/>
               </a:ext>
             </a:extLst>
           </p:cNvPr>
@@ -13723,7 +13923,7 @@
           <p:cNvPr id="15" name="">
             <a:extLst xmlns:a="http://schemas.openxmlformats.org/drawingml/2006/main">
               <a:ext uri="{FF2B5EF4-FFF2-40B4-BE49-F238E27FC236}">
-                <a16:creationId xmlns:a16="http://schemas.microsoft.com/office/drawing/2014/main" id="{7F5CD41D-FB8D-4801-A459-A1DBF4998341}"/>
+                <a16:creationId xmlns:a16="http://schemas.microsoft.com/office/drawing/2014/main" id="{FE8DE08C-B326-4DD3-A364-F0E425086654}"/>
               </a:ext>
             </a:extLst>
           </p:cNvPr>
@@ -13755,7 +13955,7 @@
           <p:cNvPr id="16" name="">
             <a:extLst xmlns:a="http://schemas.openxmlformats.org/drawingml/2006/main">
               <a:ext uri="{FF2B5EF4-FFF2-40B4-BE49-F238E27FC236}">
-                <a16:creationId xmlns:a16="http://schemas.microsoft.com/office/drawing/2014/main" id="{8BB8B79E-3721-42FE-B443-0F762BB81875}"/>
+                <a16:creationId xmlns:a16="http://schemas.microsoft.com/office/drawing/2014/main" id="{53A19B60-4332-468E-BC35-A64C23D7A90E}"/>
               </a:ext>
             </a:extLst>
           </p:cNvPr>
@@ -13812,7 +14012,7 @@
           <p:cNvPr id="17" name="">
             <a:extLst xmlns:a="http://schemas.openxmlformats.org/drawingml/2006/main">
               <a:ext uri="{FF2B5EF4-FFF2-40B4-BE49-F238E27FC236}">
-                <a16:creationId xmlns:a16="http://schemas.microsoft.com/office/drawing/2014/main" id="{012DFF92-1B77-439F-976C-113660B4B18E}"/>
+                <a16:creationId xmlns:a16="http://schemas.microsoft.com/office/drawing/2014/main" id="{2FF26654-A088-463E-A93B-59F956DF2005}"/>
               </a:ext>
             </a:extLst>
           </p:cNvPr>
@@ -13869,7 +14069,7 @@
           <p:cNvPr id="18" name="">
             <a:extLst xmlns:a="http://schemas.openxmlformats.org/drawingml/2006/main">
               <a:ext uri="{FF2B5EF4-FFF2-40B4-BE49-F238E27FC236}">
-                <a16:creationId xmlns:a16="http://schemas.microsoft.com/office/drawing/2014/main" id="{50E95A01-3862-40CE-82A7-39B8E582FC00}"/>
+                <a16:creationId xmlns:a16="http://schemas.microsoft.com/office/drawing/2014/main" id="{F220D411-EA7F-403B-A579-A4EEECF46070}"/>
               </a:ext>
             </a:extLst>
           </p:cNvPr>
@@ -13903,7 +14103,7 @@
           <p:cNvPr id="19" name="">
             <a:extLst xmlns:a="http://schemas.openxmlformats.org/drawingml/2006/main">
               <a:ext uri="{FF2B5EF4-FFF2-40B4-BE49-F238E27FC236}">
-                <a16:creationId xmlns:a16="http://schemas.microsoft.com/office/drawing/2014/main" id="{E8F98216-93FA-40A6-BEC3-025CB1E3AB53}"/>
+                <a16:creationId xmlns:a16="http://schemas.microsoft.com/office/drawing/2014/main" id="{D5AC21C8-AB6D-41B1-AAE7-08A73AB24371}"/>
               </a:ext>
             </a:extLst>
           </p:cNvPr>
@@ -13935,7 +14135,7 @@
           <p:cNvPr id="20" name="">
             <a:extLst xmlns:a="http://schemas.openxmlformats.org/drawingml/2006/main">
               <a:ext uri="{FF2B5EF4-FFF2-40B4-BE49-F238E27FC236}">
-                <a16:creationId xmlns:a16="http://schemas.microsoft.com/office/drawing/2014/main" id="{83429D22-2901-464C-AB6B-D7156410B88B}"/>
+                <a16:creationId xmlns:a16="http://schemas.microsoft.com/office/drawing/2014/main" id="{3BA3C38B-CC4D-4F74-AAF4-49FC3B966B73}"/>
               </a:ext>
             </a:extLst>
           </p:cNvPr>
@@ -13992,7 +14192,7 @@
           <p:cNvPr id="21" name="">
             <a:extLst xmlns:a="http://schemas.openxmlformats.org/drawingml/2006/main">
               <a:ext uri="{FF2B5EF4-FFF2-40B4-BE49-F238E27FC236}">
-                <a16:creationId xmlns:a16="http://schemas.microsoft.com/office/drawing/2014/main" id="{29CFB9AA-6DE3-416F-A59F-7B4DEA2C5AB6}"/>
+                <a16:creationId xmlns:a16="http://schemas.microsoft.com/office/drawing/2014/main" id="{BBA37EF8-F877-409A-B57B-0FD916CCA5A6}"/>
               </a:ext>
             </a:extLst>
           </p:cNvPr>
@@ -14047,7 +14247,7 @@
     </p:spTree>
     <p:extLst>
       <p:ext uri="{BB962C8B-B14F-4D97-AF65-F5344CB8AC3E}">
-        <p14:creationId xmlns:p14="http://schemas.microsoft.com/office/powerpoint/2010/main" val="1662698036"/>
+        <p14:creationId xmlns:p14="http://schemas.microsoft.com/office/powerpoint/2010/main" val="1038758356"/>
       </p:ext>
     </p:extLst>
   </p:cSld>
